--- a/plantilla-8am.pptx
+++ b/plantilla-8am.pptx
@@ -37,8 +37,8 @@
     <p:sldId id="279" r:id="rId25"/>
     <p:sldId id="280" r:id="rId26"/>
     <p:sldId id="281" r:id="rId27"/>
-    <p:sldId id="282" r:id="rId28"/>
-    <p:sldId id="283" r:id="rId29"/>
+    <p:sldId id="283" r:id="rId28"/>
+    <p:sldId id="282" r:id="rId29"/>
   </p:sldIdLst>
   <p:sldSz cx="12192000" cy="6858000"/>
   <p:notesSz cx="6858000" cy="9144000"/>
@@ -145,7 +145,7 @@
             <a:srgbClr val="A4A3A4"/>
           </p15:clr>
         </p15:guide>
-        <p15:guide id="3" pos="665" userDrawn="1">
+        <p15:guide id="3" pos="4203" userDrawn="1">
           <p15:clr>
             <a:srgbClr val="A4A3A4"/>
           </p15:clr>
@@ -258,7 +258,7 @@
           <a:p>
             <a:fld id="{631855BB-C5D2-4F82-B71B-CB3B65D6AB2E}" type="datetimeFigureOut">
               <a:rPr lang="es-ES" smtClean="0"/>
-              <a:t>08/03/2026</a:t>
+              <a:t>15/03/2026</a:t>
             </a:fld>
             <a:endParaRPr lang="es-ES"/>
           </a:p>
@@ -394,7 +394,7 @@
           <a:p>
             <a:fld id="{C2D228F6-8808-4B33-8B78-2B1B437F840E}" type="datetimeFigureOut">
               <a:rPr lang="es-ES" smtClean="0"/>
-              <a:t>08/03/2026</a:t>
+              <a:t>15/03/2026</a:t>
             </a:fld>
             <a:endParaRPr lang="es-ES"/>
           </a:p>
@@ -663,7 +663,7 @@
 
 <file path=ppt/slideLayouts/slideLayout1.xml><?xml version="1.0" encoding="utf-8"?>
 <p:sldLayout xmlns:a="http://schemas.openxmlformats.org/drawingml/2006/main" xmlns:r="http://schemas.openxmlformats.org/officeDocument/2006/relationships" xmlns:p="http://schemas.openxmlformats.org/presentationml/2006/main" preserve="1" userDrawn="1">
-  <p:cSld name="Contenido (Fondo B)">
+  <p:cSld name="D1">
     <p:spTree>
       <p:nvGrpSpPr>
         <p:cNvPr id="1" name=""/>
@@ -692,7 +692,7 @@
         </p:nvSpPr>
         <p:spPr>
           <a:xfrm>
-            <a:off x="3795395" y="3337106"/>
+            <a:off x="3795395" y="2107329"/>
             <a:ext cx="4601210" cy="331470"/>
           </a:xfrm>
           <a:prstGeom prst="rect">
@@ -1054,7 +1054,7 @@
 
 <file path=ppt/slideLayouts/slideLayout10.xml><?xml version="1.0" encoding="utf-8"?>
 <p:sldLayout xmlns:a="http://schemas.openxmlformats.org/drawingml/2006/main" xmlns:r="http://schemas.openxmlformats.org/officeDocument/2006/relationships" xmlns:p="http://schemas.openxmlformats.org/presentationml/2006/main" preserve="1" userDrawn="1">
-  <p:cSld name="9_D-Left">
+  <p:cSld name="D10">
     <p:bg>
       <p:bgPr>
         <a:blipFill dpi="0" rotWithShape="1">
@@ -1632,7 +1632,7 @@
 
 <file path=ppt/slideLayouts/slideLayout11.xml><?xml version="1.0" encoding="utf-8"?>
 <p:sldLayout xmlns:a="http://schemas.openxmlformats.org/drawingml/2006/main" xmlns:r="http://schemas.openxmlformats.org/officeDocument/2006/relationships" xmlns:p="http://schemas.openxmlformats.org/presentationml/2006/main" preserve="1" userDrawn="1">
-  <p:cSld name="10_D-Left">
+  <p:cSld name="D11">
     <p:bg>
       <p:bgPr>
         <a:blipFill dpi="0" rotWithShape="1">
@@ -2116,7 +2116,7 @@
 
 <file path=ppt/slideLayouts/slideLayout12.xml><?xml version="1.0" encoding="utf-8"?>
 <p:sldLayout xmlns:a="http://schemas.openxmlformats.org/drawingml/2006/main" xmlns:r="http://schemas.openxmlformats.org/officeDocument/2006/relationships" xmlns:p="http://schemas.openxmlformats.org/presentationml/2006/main" preserve="1" userDrawn="1">
-  <p:cSld name="11_D-Left">
+  <p:cSld name="D12">
     <p:bg>
       <p:bgPr>
         <a:blipFill dpi="0" rotWithShape="1">
@@ -2597,7 +2597,7 @@
 
 <file path=ppt/slideLayouts/slideLayout13.xml><?xml version="1.0" encoding="utf-8"?>
 <p:sldLayout xmlns:a="http://schemas.openxmlformats.org/drawingml/2006/main" xmlns:r="http://schemas.openxmlformats.org/officeDocument/2006/relationships" xmlns:p="http://schemas.openxmlformats.org/presentationml/2006/main" preserve="1" userDrawn="1">
-  <p:cSld name="12_D-Left">
+  <p:cSld name="D13">
     <p:bg>
       <p:bgPr>
         <a:blipFill dpi="0" rotWithShape="1">
@@ -3078,7 +3078,7 @@
 
 <file path=ppt/slideLayouts/slideLayout14.xml><?xml version="1.0" encoding="utf-8"?>
 <p:sldLayout xmlns:a="http://schemas.openxmlformats.org/drawingml/2006/main" xmlns:r="http://schemas.openxmlformats.org/officeDocument/2006/relationships" xmlns:p="http://schemas.openxmlformats.org/presentationml/2006/main" preserve="1" userDrawn="1">
-  <p:cSld name="13_D-Left">
+  <p:cSld name="D14">
     <p:bg>
       <p:bgPr>
         <a:blipFill dpi="0" rotWithShape="1">
@@ -3673,7 +3673,7 @@
 
 <file path=ppt/slideLayouts/slideLayout15.xml><?xml version="1.0" encoding="utf-8"?>
 <p:sldLayout xmlns:a="http://schemas.openxmlformats.org/drawingml/2006/main" xmlns:r="http://schemas.openxmlformats.org/officeDocument/2006/relationships" xmlns:p="http://schemas.openxmlformats.org/presentationml/2006/main" preserve="1" userDrawn="1">
-  <p:cSld name="14_D-Left">
+  <p:cSld name="D15">
     <p:bg>
       <p:bgPr>
         <a:blipFill dpi="0" rotWithShape="1">
@@ -4120,7 +4120,7 @@
 
 <file path=ppt/slideLayouts/slideLayout16.xml><?xml version="1.0" encoding="utf-8"?>
 <p:sldLayout xmlns:a="http://schemas.openxmlformats.org/drawingml/2006/main" xmlns:r="http://schemas.openxmlformats.org/officeDocument/2006/relationships" xmlns:p="http://schemas.openxmlformats.org/presentationml/2006/main" preserve="1" userDrawn="1">
-  <p:cSld name="15_D-Left">
+  <p:cSld name="D16">
     <p:bg>
       <p:bgPr>
         <a:blipFill dpi="0" rotWithShape="1">
@@ -4694,7 +4694,7 @@
 
 <file path=ppt/slideLayouts/slideLayout17.xml><?xml version="1.0" encoding="utf-8"?>
 <p:sldLayout xmlns:a="http://schemas.openxmlformats.org/drawingml/2006/main" xmlns:r="http://schemas.openxmlformats.org/officeDocument/2006/relationships" xmlns:p="http://schemas.openxmlformats.org/presentationml/2006/main" preserve="1" userDrawn="1">
-  <p:cSld name="16_D-Left">
+  <p:cSld name="D17">
     <p:bg>
       <p:bgPr>
         <a:blipFill dpi="0" rotWithShape="1">
@@ -5749,7 +5749,7 @@
 
 <file path=ppt/slideLayouts/slideLayout18.xml><?xml version="1.0" encoding="utf-8"?>
 <p:sldLayout xmlns:a="http://schemas.openxmlformats.org/drawingml/2006/main" xmlns:r="http://schemas.openxmlformats.org/officeDocument/2006/relationships" xmlns:p="http://schemas.openxmlformats.org/presentationml/2006/main" preserve="1" userDrawn="1">
-  <p:cSld name="17_D-Left">
+  <p:cSld name="D18">
     <p:bg>
       <p:bgPr>
         <a:blipFill dpi="0" rotWithShape="1">
@@ -6301,7 +6301,7 @@
 
 <file path=ppt/slideLayouts/slideLayout19.xml><?xml version="1.0" encoding="utf-8"?>
 <p:sldLayout xmlns:a="http://schemas.openxmlformats.org/drawingml/2006/main" xmlns:r="http://schemas.openxmlformats.org/officeDocument/2006/relationships" xmlns:p="http://schemas.openxmlformats.org/presentationml/2006/main" preserve="1" userDrawn="1">
-  <p:cSld name="18_D-Left">
+  <p:cSld name="D19">
     <p:bg>
       <p:bgPr>
         <a:blipFill dpi="0" rotWithShape="1">
@@ -6708,7 +6708,7 @@
 
 <file path=ppt/slideLayouts/slideLayout2.xml><?xml version="1.0" encoding="utf-8"?>
 <p:sldLayout xmlns:a="http://schemas.openxmlformats.org/drawingml/2006/main" xmlns:r="http://schemas.openxmlformats.org/officeDocument/2006/relationships" xmlns:p="http://schemas.openxmlformats.org/presentationml/2006/main" showMasterSp="0" preserve="1" userDrawn="1">
-  <p:cSld name="D-Rigth">
+  <p:cSld name="D2">
     <p:bg>
       <p:bgPr>
         <a:blipFill dpi="0" rotWithShape="1">
@@ -9027,7 +9027,7 @@
 
 <file path=ppt/slideLayouts/slideLayout20.xml><?xml version="1.0" encoding="utf-8"?>
 <p:sldLayout xmlns:a="http://schemas.openxmlformats.org/drawingml/2006/main" xmlns:r="http://schemas.openxmlformats.org/officeDocument/2006/relationships" xmlns:p="http://schemas.openxmlformats.org/presentationml/2006/main" preserve="1" userDrawn="1">
-  <p:cSld name="19_D-Left">
+  <p:cSld name="D20">
     <p:bg>
       <p:bgPr>
         <a:blipFill dpi="0" rotWithShape="1">
@@ -10273,7 +10273,7 @@
 
 <file path=ppt/slideLayouts/slideLayout21.xml><?xml version="1.0" encoding="utf-8"?>
 <p:sldLayout xmlns:a="http://schemas.openxmlformats.org/drawingml/2006/main" xmlns:r="http://schemas.openxmlformats.org/officeDocument/2006/relationships" xmlns:p="http://schemas.openxmlformats.org/presentationml/2006/main" preserve="1" userDrawn="1">
-  <p:cSld name="20_D-Left">
+  <p:cSld name="D21">
     <p:bg>
       <p:bgPr>
         <a:blipFill dpi="0" rotWithShape="1">
@@ -10809,7 +10809,7 @@
 
 <file path=ppt/slideLayouts/slideLayout22.xml><?xml version="1.0" encoding="utf-8"?>
 <p:sldLayout xmlns:a="http://schemas.openxmlformats.org/drawingml/2006/main" xmlns:r="http://schemas.openxmlformats.org/officeDocument/2006/relationships" xmlns:p="http://schemas.openxmlformats.org/presentationml/2006/main" preserve="1" userDrawn="1">
-  <p:cSld name="21_D-Left">
+  <p:cSld name="D22">
     <p:bg>
       <p:bgPr>
         <a:blipFill dpi="0" rotWithShape="1">
@@ -11265,7 +11265,7 @@
 
 <file path=ppt/slideLayouts/slideLayout23.xml><?xml version="1.0" encoding="utf-8"?>
 <p:sldLayout xmlns:a="http://schemas.openxmlformats.org/drawingml/2006/main" xmlns:r="http://schemas.openxmlformats.org/officeDocument/2006/relationships" xmlns:p="http://schemas.openxmlformats.org/presentationml/2006/main" preserve="1" userDrawn="1">
-  <p:cSld name="22_D-Left">
+  <p:cSld name="D23">
     <p:bg>
       <p:bgPr>
         <a:blipFill dpi="0" rotWithShape="1">
@@ -11721,7 +11721,7 @@
 
 <file path=ppt/slideLayouts/slideLayout24.xml><?xml version="1.0" encoding="utf-8"?>
 <p:sldLayout xmlns:a="http://schemas.openxmlformats.org/drawingml/2006/main" xmlns:r="http://schemas.openxmlformats.org/officeDocument/2006/relationships" xmlns:p="http://schemas.openxmlformats.org/presentationml/2006/main" preserve="1" userDrawn="1">
-  <p:cSld name="23_D-Left">
+  <p:cSld name="D24">
     <p:bg>
       <p:bgPr>
         <a:blipFill dpi="0" rotWithShape="1">
@@ -12148,7 +12148,7 @@
 
 <file path=ppt/slideLayouts/slideLayout25.xml><?xml version="1.0" encoding="utf-8"?>
 <p:sldLayout xmlns:a="http://schemas.openxmlformats.org/drawingml/2006/main" xmlns:r="http://schemas.openxmlformats.org/officeDocument/2006/relationships" xmlns:p="http://schemas.openxmlformats.org/presentationml/2006/main" preserve="1" userDrawn="1">
-  <p:cSld name="24_D-Left">
+  <p:cSld name="D25">
     <p:bg>
       <p:bgPr>
         <a:blipFill dpi="0" rotWithShape="1">
@@ -12611,7 +12611,7 @@
 
 <file path=ppt/slideLayouts/slideLayout26.xml><?xml version="1.0" encoding="utf-8"?>
 <p:sldLayout xmlns:a="http://schemas.openxmlformats.org/drawingml/2006/main" xmlns:r="http://schemas.openxmlformats.org/officeDocument/2006/relationships" xmlns:p="http://schemas.openxmlformats.org/presentationml/2006/main" preserve="1" userDrawn="1">
-  <p:cSld name="25_D-Left">
+  <p:cSld name="D26">
     <p:bg>
       <p:bgPr>
         <a:blipFill dpi="0" rotWithShape="1">
@@ -12966,7 +12966,7 @@
 
 <file path=ppt/slideLayouts/slideLayout27.xml><?xml version="1.0" encoding="utf-8"?>
 <p:sldLayout xmlns:a="http://schemas.openxmlformats.org/drawingml/2006/main" xmlns:r="http://schemas.openxmlformats.org/officeDocument/2006/relationships" xmlns:p="http://schemas.openxmlformats.org/presentationml/2006/main" preserve="1" userDrawn="1">
-  <p:cSld name="1_Diseño personalizado">
+  <p:cSld name="D27">
     <p:bg>
       <p:bgPr>
         <a:blipFill dpi="0" rotWithShape="1">
@@ -13085,7 +13085,7 @@
 
 <file path=ppt/slideLayouts/slideLayout28.xml><?xml version="1.0" encoding="utf-8"?>
 <p:sldLayout xmlns:a="http://schemas.openxmlformats.org/drawingml/2006/main" xmlns:r="http://schemas.openxmlformats.org/officeDocument/2006/relationships" xmlns:p="http://schemas.openxmlformats.org/presentationml/2006/main" preserve="1" userDrawn="1">
-  <p:cSld name="2_Diseño personalizado">
+  <p:cSld name="D28">
     <p:bg>
       <p:bgPr>
         <a:blipFill dpi="0" rotWithShape="1">
@@ -13165,7 +13165,7 @@
 
 <file path=ppt/slideLayouts/slideLayout3.xml><?xml version="1.0" encoding="utf-8"?>
 <p:sldLayout xmlns:a="http://schemas.openxmlformats.org/drawingml/2006/main" xmlns:r="http://schemas.openxmlformats.org/officeDocument/2006/relationships" xmlns:p="http://schemas.openxmlformats.org/presentationml/2006/main" showMasterSp="0" preserve="1" userDrawn="1">
-  <p:cSld name="1_D-Rigth">
+  <p:cSld name="D3">
     <p:bg>
       <p:bgPr>
         <a:blipFill dpi="0" rotWithShape="1">
@@ -13910,7 +13910,7 @@
 
 <file path=ppt/slideLayouts/slideLayout4.xml><?xml version="1.0" encoding="utf-8"?>
 <p:sldLayout xmlns:a="http://schemas.openxmlformats.org/drawingml/2006/main" xmlns:r="http://schemas.openxmlformats.org/officeDocument/2006/relationships" xmlns:p="http://schemas.openxmlformats.org/presentationml/2006/main" preserve="1" userDrawn="1">
-  <p:cSld name="D-Left">
+  <p:cSld name="D4">
     <p:bg>
       <p:bgPr>
         <a:blipFill dpi="0" rotWithShape="1">
@@ -14405,7 +14405,7 @@
 
 <file path=ppt/slideLayouts/slideLayout5.xml><?xml version="1.0" encoding="utf-8"?>
 <p:sldLayout xmlns:a="http://schemas.openxmlformats.org/drawingml/2006/main" xmlns:r="http://schemas.openxmlformats.org/officeDocument/2006/relationships" xmlns:p="http://schemas.openxmlformats.org/presentationml/2006/main" preserve="1" userDrawn="1">
-  <p:cSld name="2_D-Left">
+  <p:cSld name="D5">
     <p:bg>
       <p:bgPr>
         <a:blipFill dpi="0" rotWithShape="1">
@@ -14873,7 +14873,7 @@
 
 <file path=ppt/slideLayouts/slideLayout6.xml><?xml version="1.0" encoding="utf-8"?>
 <p:sldLayout xmlns:a="http://schemas.openxmlformats.org/drawingml/2006/main" xmlns:r="http://schemas.openxmlformats.org/officeDocument/2006/relationships" xmlns:p="http://schemas.openxmlformats.org/presentationml/2006/main" preserve="1" userDrawn="1">
-  <p:cSld name="3_D-Left">
+  <p:cSld name="D6">
     <p:bg>
       <p:bgPr>
         <a:blipFill dpi="0" rotWithShape="1">
@@ -15341,7 +15341,7 @@
 
 <file path=ppt/slideLayouts/slideLayout7.xml><?xml version="1.0" encoding="utf-8"?>
 <p:sldLayout xmlns:a="http://schemas.openxmlformats.org/drawingml/2006/main" xmlns:r="http://schemas.openxmlformats.org/officeDocument/2006/relationships" xmlns:p="http://schemas.openxmlformats.org/presentationml/2006/main" preserve="1" userDrawn="1">
-  <p:cSld name="1_D-Left">
+  <p:cSld name="D7">
     <p:bg>
       <p:bgPr>
         <a:blipFill dpi="0" rotWithShape="1">
@@ -15835,7 +15835,7 @@
 
 <file path=ppt/slideLayouts/slideLayout8.xml><?xml version="1.0" encoding="utf-8"?>
 <p:sldLayout xmlns:a="http://schemas.openxmlformats.org/drawingml/2006/main" xmlns:r="http://schemas.openxmlformats.org/officeDocument/2006/relationships" xmlns:p="http://schemas.openxmlformats.org/presentationml/2006/main" preserve="1" userDrawn="1">
-  <p:cSld name="5_D-Left">
+  <p:cSld name="D8">
     <p:bg>
       <p:bgPr>
         <a:blipFill dpi="0" rotWithShape="1">
@@ -16430,7 +16430,7 @@
 
 <file path=ppt/slideLayouts/slideLayout9.xml><?xml version="1.0" encoding="utf-8"?>
 <p:sldLayout xmlns:a="http://schemas.openxmlformats.org/drawingml/2006/main" xmlns:r="http://schemas.openxmlformats.org/officeDocument/2006/relationships" xmlns:p="http://schemas.openxmlformats.org/presentationml/2006/main" preserve="1" userDrawn="1">
-  <p:cSld name="8_D-Left">
+  <p:cSld name="D9">
     <p:bg>
       <p:bgPr>
         <a:blipFill dpi="0" rotWithShape="1">
@@ -17566,10 +17566,10 @@
       </p:grpSpPr>
       <p:sp>
         <p:nvSpPr>
-          <p:cNvPr id="3" name="txtFecha">
+          <p:cNvPr id="2" name="txtFecha">
             <a:extLst>
               <a:ext uri="{FF2B5EF4-FFF2-40B4-BE49-F238E27FC236}">
-                <a16:creationId xmlns:a16="http://schemas.microsoft.com/office/drawing/2014/main" id="{726ECCF2-3197-4EDD-A226-4ABFCB14EFA7}"/>
+                <a16:creationId xmlns:a16="http://schemas.microsoft.com/office/drawing/2014/main" id="{6C500255-02F8-4828-8EF3-65655588ED80}"/>
               </a:ext>
             </a:extLst>
           </p:cNvPr>
@@ -17578,7 +17578,7 @@
         </p:nvSpPr>
         <p:spPr>
           <a:xfrm>
-            <a:off x="3584983" y="4085150"/>
+            <a:off x="3584983" y="3243789"/>
             <a:ext cx="5022034" cy="370422"/>
           </a:xfrm>
           <a:prstGeom prst="rect">
@@ -17630,7 +17630,7 @@
     </p:spTree>
     <p:extLst>
       <p:ext uri="{BB962C8B-B14F-4D97-AF65-F5344CB8AC3E}">
-        <p14:creationId xmlns:p14="http://schemas.microsoft.com/office/powerpoint/2010/main" val="318876439"/>
+        <p14:creationId xmlns:p14="http://schemas.microsoft.com/office/powerpoint/2010/main" val="2146214667"/>
       </p:ext>
     </p:extLst>
   </p:cSld>
@@ -17662,7 +17662,7 @@
           <p:cNvPr id="2" name="imgMarco-D10">
             <a:extLst>
               <a:ext uri="{FF2B5EF4-FFF2-40B4-BE49-F238E27FC236}">
-                <a16:creationId xmlns:a16="http://schemas.microsoft.com/office/drawing/2014/main" id="{CE4D0938-3431-4F27-AB07-EBB8D677B3C7}"/>
+                <a16:creationId xmlns:a16="http://schemas.microsoft.com/office/drawing/2014/main" id="{CD6AD645-B217-4085-8F1C-F1C24416020A}"/>
               </a:ext>
             </a:extLst>
           </p:cNvPr>
@@ -17671,8 +17671,8 @@
         </p:nvSpPr>
         <p:spPr>
           <a:xfrm>
-            <a:off x="1261586" y="2473697"/>
-            <a:ext cx="9668828" cy="1910607"/>
+            <a:off x="1261586" y="1436460"/>
+            <a:ext cx="9668828" cy="4537530"/>
           </a:xfrm>
           <a:prstGeom prst="rect">
             <a:avLst/>
@@ -17708,7 +17708,7 @@
     </p:spTree>
     <p:extLst>
       <p:ext uri="{BB962C8B-B14F-4D97-AF65-F5344CB8AC3E}">
-        <p14:creationId xmlns:p14="http://schemas.microsoft.com/office/powerpoint/2010/main" val="715291339"/>
+        <p14:creationId xmlns:p14="http://schemas.microsoft.com/office/powerpoint/2010/main" val="1305693845"/>
       </p:ext>
     </p:extLst>
   </p:cSld>
@@ -17740,7 +17740,7 @@
           <p:cNvPr id="2" name="imgMarco-D11">
             <a:extLst>
               <a:ext uri="{FF2B5EF4-FFF2-40B4-BE49-F238E27FC236}">
-                <a16:creationId xmlns:a16="http://schemas.microsoft.com/office/drawing/2014/main" id="{093BCA50-F644-4070-92A0-0D772D1E8537}"/>
+                <a16:creationId xmlns:a16="http://schemas.microsoft.com/office/drawing/2014/main" id="{0028E484-6A61-4581-8E91-5BA1557DD61C}"/>
               </a:ext>
             </a:extLst>
           </p:cNvPr>
@@ -17749,8 +17749,8 @@
         </p:nvSpPr>
         <p:spPr>
           <a:xfrm>
-            <a:off x="1261586" y="2258801"/>
-            <a:ext cx="9668828" cy="2340398"/>
+            <a:off x="1261586" y="1436460"/>
+            <a:ext cx="9668828" cy="4537530"/>
           </a:xfrm>
           <a:prstGeom prst="rect">
             <a:avLst/>
@@ -17786,7 +17786,7 @@
     </p:spTree>
     <p:extLst>
       <p:ext uri="{BB962C8B-B14F-4D97-AF65-F5344CB8AC3E}">
-        <p14:creationId xmlns:p14="http://schemas.microsoft.com/office/powerpoint/2010/main" val="3575396503"/>
+        <p14:creationId xmlns:p14="http://schemas.microsoft.com/office/powerpoint/2010/main" val="2195046541"/>
       </p:ext>
     </p:extLst>
   </p:cSld>
@@ -17818,7 +17818,7 @@
           <p:cNvPr id="2" name="imgMarco-D12">
             <a:extLst>
               <a:ext uri="{FF2B5EF4-FFF2-40B4-BE49-F238E27FC236}">
-                <a16:creationId xmlns:a16="http://schemas.microsoft.com/office/drawing/2014/main" id="{3EB5E084-1B66-4114-9750-705CF1100785}"/>
+                <a16:creationId xmlns:a16="http://schemas.microsoft.com/office/drawing/2014/main" id="{DE88FB30-11FF-4DE7-89BD-30EFC1440BAE}"/>
               </a:ext>
             </a:extLst>
           </p:cNvPr>
@@ -17827,8 +17827,8 @@
         </p:nvSpPr>
         <p:spPr>
           <a:xfrm>
-            <a:off x="1261586" y="1463256"/>
-            <a:ext cx="9668828" cy="3931488"/>
+            <a:off x="1261586" y="1436460"/>
+            <a:ext cx="9668828" cy="4537530"/>
           </a:xfrm>
           <a:prstGeom prst="rect">
             <a:avLst/>
@@ -17864,7 +17864,7 @@
     </p:spTree>
     <p:extLst>
       <p:ext uri="{BB962C8B-B14F-4D97-AF65-F5344CB8AC3E}">
-        <p14:creationId xmlns:p14="http://schemas.microsoft.com/office/powerpoint/2010/main" val="1379715029"/>
+        <p14:creationId xmlns:p14="http://schemas.microsoft.com/office/powerpoint/2010/main" val="2451837138"/>
       </p:ext>
     </p:extLst>
   </p:cSld>
@@ -17896,7 +17896,7 @@
           <p:cNvPr id="2" name="imgMarco-D13">
             <a:extLst>
               <a:ext uri="{FF2B5EF4-FFF2-40B4-BE49-F238E27FC236}">
-                <a16:creationId xmlns:a16="http://schemas.microsoft.com/office/drawing/2014/main" id="{79AF06DD-7EA2-45D4-B6C7-992A386843E2}"/>
+                <a16:creationId xmlns:a16="http://schemas.microsoft.com/office/drawing/2014/main" id="{4F3BB363-C79D-4CF3-8559-8673CCB5F540}"/>
               </a:ext>
             </a:extLst>
           </p:cNvPr>
@@ -17905,8 +17905,8 @@
         </p:nvSpPr>
         <p:spPr>
           <a:xfrm>
-            <a:off x="1261586" y="1427105"/>
-            <a:ext cx="9668828" cy="4003791"/>
+            <a:off x="1261586" y="1436460"/>
+            <a:ext cx="9668828" cy="4537530"/>
           </a:xfrm>
           <a:prstGeom prst="rect">
             <a:avLst/>
@@ -17942,7 +17942,7 @@
     </p:spTree>
     <p:extLst>
       <p:ext uri="{BB962C8B-B14F-4D97-AF65-F5344CB8AC3E}">
-        <p14:creationId xmlns:p14="http://schemas.microsoft.com/office/powerpoint/2010/main" val="4203887716"/>
+        <p14:creationId xmlns:p14="http://schemas.microsoft.com/office/powerpoint/2010/main" val="3951189256"/>
       </p:ext>
     </p:extLst>
   </p:cSld>
@@ -17974,7 +17974,7 @@
           <p:cNvPr id="2" name="imgMarco-D14">
             <a:extLst>
               <a:ext uri="{FF2B5EF4-FFF2-40B4-BE49-F238E27FC236}">
-                <a16:creationId xmlns:a16="http://schemas.microsoft.com/office/drawing/2014/main" id="{516F70A3-CB8D-400A-9F61-718D5782A396}"/>
+                <a16:creationId xmlns:a16="http://schemas.microsoft.com/office/drawing/2014/main" id="{79935A0F-C562-475E-8FC1-187B3DC424F1}"/>
               </a:ext>
             </a:extLst>
           </p:cNvPr>
@@ -17983,8 +17983,8 @@
         </p:nvSpPr>
         <p:spPr>
           <a:xfrm>
-            <a:off x="1261586" y="2258801"/>
-            <a:ext cx="9668828" cy="2340398"/>
+            <a:off x="3231154" y="1896427"/>
+            <a:ext cx="5729692" cy="3065146"/>
           </a:xfrm>
           <a:prstGeom prst="rect">
             <a:avLst/>
@@ -18020,7 +18020,7 @@
     </p:spTree>
     <p:extLst>
       <p:ext uri="{BB962C8B-B14F-4D97-AF65-F5344CB8AC3E}">
-        <p14:creationId xmlns:p14="http://schemas.microsoft.com/office/powerpoint/2010/main" val="3542912953"/>
+        <p14:creationId xmlns:p14="http://schemas.microsoft.com/office/powerpoint/2010/main" val="3727198724"/>
       </p:ext>
     </p:extLst>
   </p:cSld>
@@ -18052,7 +18052,7 @@
           <p:cNvPr id="2" name="imgMarco-D15">
             <a:extLst>
               <a:ext uri="{FF2B5EF4-FFF2-40B4-BE49-F238E27FC236}">
-                <a16:creationId xmlns:a16="http://schemas.microsoft.com/office/drawing/2014/main" id="{39F77204-AA6E-4556-925E-7441B1AE593B}"/>
+                <a16:creationId xmlns:a16="http://schemas.microsoft.com/office/drawing/2014/main" id="{2287E631-9841-4862-A915-AC48BF8D5D42}"/>
               </a:ext>
             </a:extLst>
           </p:cNvPr>
@@ -18061,8 +18061,8 @@
         </p:nvSpPr>
         <p:spPr>
           <a:xfrm>
-            <a:off x="1261586" y="1420932"/>
-            <a:ext cx="9668828" cy="4016137"/>
+            <a:off x="1572285" y="1625286"/>
+            <a:ext cx="9047430" cy="4159878"/>
           </a:xfrm>
           <a:prstGeom prst="rect">
             <a:avLst/>
@@ -18098,7 +18098,7 @@
     </p:spTree>
     <p:extLst>
       <p:ext uri="{BB962C8B-B14F-4D97-AF65-F5344CB8AC3E}">
-        <p14:creationId xmlns:p14="http://schemas.microsoft.com/office/powerpoint/2010/main" val="2487651228"/>
+        <p14:creationId xmlns:p14="http://schemas.microsoft.com/office/powerpoint/2010/main" val="3219492183"/>
       </p:ext>
     </p:extLst>
   </p:cSld>
@@ -18127,10 +18127,58 @@
       </p:grpSpPr>
       <p:sp>
         <p:nvSpPr>
-          <p:cNvPr id="4" name="imgMarco-D16-2">
+          <p:cNvPr id="2" name="imgMarco-D16-1">
             <a:extLst>
               <a:ext uri="{FF2B5EF4-FFF2-40B4-BE49-F238E27FC236}">
-                <a16:creationId xmlns:a16="http://schemas.microsoft.com/office/drawing/2014/main" id="{85768EDA-AE20-4E8A-82E6-828FB2F6C879}"/>
+                <a16:creationId xmlns:a16="http://schemas.microsoft.com/office/drawing/2014/main" id="{01A30E5F-1437-4823-98A3-304E4F41E9E8}"/>
+              </a:ext>
+            </a:extLst>
+          </p:cNvPr>
+          <p:cNvSpPr/>
+          <p:nvPr/>
+        </p:nvSpPr>
+        <p:spPr>
+          <a:xfrm>
+            <a:off x="1055687" y="1334820"/>
+            <a:ext cx="10080625" cy="2009761"/>
+          </a:xfrm>
+          <a:prstGeom prst="rect">
+            <a:avLst/>
+          </a:prstGeom>
+          <a:noFill/>
+          <a:ln>
+            <a:noFill/>
+          </a:ln>
+        </p:spPr>
+        <p:style>
+          <a:lnRef idx="0">
+            <a:scrgbClr r="0" g="0" b="0"/>
+          </a:lnRef>
+          <a:fillRef idx="0">
+            <a:scrgbClr r="0" g="0" b="0"/>
+          </a:fillRef>
+          <a:effectRef idx="0">
+            <a:scrgbClr r="0" g="0" b="0"/>
+          </a:effectRef>
+          <a:fontRef idx="minor">
+            <a:schemeClr val="accent2"/>
+          </a:fontRef>
+        </p:style>
+        <p:txBody>
+          <a:bodyPr rtlCol="0" anchor="ctr"/>
+          <a:lstStyle/>
+          <a:p>
+            <a:pPr algn="ctr"/>
+            <a:endParaRPr lang="es-ES" dirty="0"/>
+          </a:p>
+        </p:txBody>
+      </p:sp>
+      <p:sp>
+        <p:nvSpPr>
+          <p:cNvPr id="3" name="imgMarco-D16-2">
+            <a:extLst>
+              <a:ext uri="{FF2B5EF4-FFF2-40B4-BE49-F238E27FC236}">
+                <a16:creationId xmlns:a16="http://schemas.microsoft.com/office/drawing/2014/main" id="{EA9A64EB-2FE7-41CE-B85D-A99A37ADEC77}"/>
               </a:ext>
             </a:extLst>
           </p:cNvPr>
@@ -18175,58 +18223,10 @@
       </p:sp>
       <p:sp>
         <p:nvSpPr>
-          <p:cNvPr id="2" name="imgMarco-D16-1">
+          <p:cNvPr id="5" name="txt-D16-2">
             <a:extLst>
               <a:ext uri="{FF2B5EF4-FFF2-40B4-BE49-F238E27FC236}">
-                <a16:creationId xmlns:a16="http://schemas.microsoft.com/office/drawing/2014/main" id="{E2D7B462-F04D-4470-9E1A-A3BE9015B30C}"/>
-              </a:ext>
-            </a:extLst>
-          </p:cNvPr>
-          <p:cNvSpPr/>
-          <p:nvPr/>
-        </p:nvSpPr>
-        <p:spPr>
-          <a:xfrm>
-            <a:off x="1186991" y="1334820"/>
-            <a:ext cx="9818019" cy="2009761"/>
-          </a:xfrm>
-          <a:prstGeom prst="rect">
-            <a:avLst/>
-          </a:prstGeom>
-          <a:noFill/>
-          <a:ln>
-            <a:noFill/>
-          </a:ln>
-        </p:spPr>
-        <p:style>
-          <a:lnRef idx="0">
-            <a:scrgbClr r="0" g="0" b="0"/>
-          </a:lnRef>
-          <a:fillRef idx="0">
-            <a:scrgbClr r="0" g="0" b="0"/>
-          </a:fillRef>
-          <a:effectRef idx="0">
-            <a:scrgbClr r="0" g="0" b="0"/>
-          </a:effectRef>
-          <a:fontRef idx="minor">
-            <a:schemeClr val="accent2"/>
-          </a:fontRef>
-        </p:style>
-        <p:txBody>
-          <a:bodyPr rtlCol="0" anchor="ctr"/>
-          <a:lstStyle/>
-          <a:p>
-            <a:pPr algn="ctr"/>
-            <a:endParaRPr lang="es-ES" dirty="0"/>
-          </a:p>
-        </p:txBody>
-      </p:sp>
-      <p:sp>
-        <p:nvSpPr>
-          <p:cNvPr id="5" name="txt-D16-2">
-            <a:extLst>
-              <a:ext uri="{FF2B5EF4-FFF2-40B4-BE49-F238E27FC236}">
-                <a16:creationId xmlns:a16="http://schemas.microsoft.com/office/drawing/2014/main" id="{B28A389D-3866-4CAC-872A-27F2E83BE0AE}"/>
+                <a16:creationId xmlns:a16="http://schemas.microsoft.com/office/drawing/2014/main" id="{615E12AC-5EF7-4DE2-B2D1-2E1B152AF345}"/>
               </a:ext>
             </a:extLst>
           </p:cNvPr>
@@ -18275,10 +18275,10 @@
       </p:sp>
       <p:sp>
         <p:nvSpPr>
-          <p:cNvPr id="3" name="txt-D16-1">
+          <p:cNvPr id="6" name="txt-D16-1">
             <a:extLst>
               <a:ext uri="{FF2B5EF4-FFF2-40B4-BE49-F238E27FC236}">
-                <a16:creationId xmlns:a16="http://schemas.microsoft.com/office/drawing/2014/main" id="{647A1F2E-F376-4631-B2BD-9904D82017F9}"/>
+                <a16:creationId xmlns:a16="http://schemas.microsoft.com/office/drawing/2014/main" id="{85AB65EC-624A-4E20-8BC0-2B67921318B7}"/>
               </a:ext>
             </a:extLst>
           </p:cNvPr>
@@ -18328,7 +18328,7 @@
     </p:spTree>
     <p:extLst>
       <p:ext uri="{BB962C8B-B14F-4D97-AF65-F5344CB8AC3E}">
-        <p14:creationId xmlns:p14="http://schemas.microsoft.com/office/powerpoint/2010/main" val="283700079"/>
+        <p14:creationId xmlns:p14="http://schemas.microsoft.com/office/powerpoint/2010/main" val="3836610927"/>
       </p:ext>
     </p:extLst>
   </p:cSld>
@@ -18360,7 +18360,7 @@
           <p:cNvPr id="2" name="imgMarco-D17-1">
             <a:extLst>
               <a:ext uri="{FF2B5EF4-FFF2-40B4-BE49-F238E27FC236}">
-                <a16:creationId xmlns:a16="http://schemas.microsoft.com/office/drawing/2014/main" id="{8EC805C3-5D12-43CF-8E7A-5D648D49F5D1}"/>
+                <a16:creationId xmlns:a16="http://schemas.microsoft.com/office/drawing/2014/main" id="{04EF82CF-4068-4CD8-A7FF-C80FC3347342}"/>
               </a:ext>
             </a:extLst>
           </p:cNvPr>
@@ -18369,8 +18369,8 @@
         </p:nvSpPr>
         <p:spPr>
           <a:xfrm>
-            <a:off x="1071085" y="1464419"/>
-            <a:ext cx="7129951" cy="1964581"/>
+            <a:off x="1071085" y="1436460"/>
+            <a:ext cx="7129951" cy="2087723"/>
           </a:xfrm>
           <a:prstGeom prst="rect">
             <a:avLst/>
@@ -18408,7 +18408,7 @@
           <p:cNvPr id="3" name="imgMarco-D17-2">
             <a:extLst>
               <a:ext uri="{FF2B5EF4-FFF2-40B4-BE49-F238E27FC236}">
-                <a16:creationId xmlns:a16="http://schemas.microsoft.com/office/drawing/2014/main" id="{A89FDCBE-733A-4644-BA19-A2FF75744E3E}"/>
+                <a16:creationId xmlns:a16="http://schemas.microsoft.com/office/drawing/2014/main" id="{4F556139-F46E-4769-914C-87C2317D4C9C}"/>
               </a:ext>
             </a:extLst>
           </p:cNvPr>
@@ -18417,8 +18417,8 @@
         </p:nvSpPr>
         <p:spPr>
           <a:xfrm>
-            <a:off x="1055689" y="4084384"/>
-            <a:ext cx="7129950" cy="2031802"/>
+            <a:off x="1055689" y="4056423"/>
+            <a:ext cx="7129950" cy="2087723"/>
           </a:xfrm>
           <a:prstGeom prst="rect">
             <a:avLst/>
@@ -18454,7 +18454,7 @@
     </p:spTree>
     <p:extLst>
       <p:ext uri="{BB962C8B-B14F-4D97-AF65-F5344CB8AC3E}">
-        <p14:creationId xmlns:p14="http://schemas.microsoft.com/office/powerpoint/2010/main" val="25498125"/>
+        <p14:creationId xmlns:p14="http://schemas.microsoft.com/office/powerpoint/2010/main" val="2136107115"/>
       </p:ext>
     </p:extLst>
   </p:cSld>
@@ -18486,7 +18486,7 @@
           <p:cNvPr id="2" name="imgMarco-D18">
             <a:extLst>
               <a:ext uri="{FF2B5EF4-FFF2-40B4-BE49-F238E27FC236}">
-                <a16:creationId xmlns:a16="http://schemas.microsoft.com/office/drawing/2014/main" id="{2D7BF805-91B2-4A18-BB24-818E99720D78}"/>
+                <a16:creationId xmlns:a16="http://schemas.microsoft.com/office/drawing/2014/main" id="{F0FC6F59-7136-4BE0-8B3A-6CA367511EAB}"/>
               </a:ext>
             </a:extLst>
           </p:cNvPr>
@@ -18532,7 +18532,7 @@
     </p:spTree>
     <p:extLst>
       <p:ext uri="{BB962C8B-B14F-4D97-AF65-F5344CB8AC3E}">
-        <p14:creationId xmlns:p14="http://schemas.microsoft.com/office/powerpoint/2010/main" val="595320716"/>
+        <p14:creationId xmlns:p14="http://schemas.microsoft.com/office/powerpoint/2010/main" val="55358731"/>
       </p:ext>
     </p:extLst>
   </p:cSld>
@@ -18564,7 +18564,193 @@
           <p:cNvPr id="2" name="imgMarco-D19">
             <a:extLst>
               <a:ext uri="{FF2B5EF4-FFF2-40B4-BE49-F238E27FC236}">
-                <a16:creationId xmlns:a16="http://schemas.microsoft.com/office/drawing/2014/main" id="{62DE7E35-3055-4FA9-9CF6-174D80BC17BB}"/>
+                <a16:creationId xmlns:a16="http://schemas.microsoft.com/office/drawing/2014/main" id="{D8010744-E805-4102-9DC5-C3A78FDB286F}"/>
+              </a:ext>
+            </a:extLst>
+          </p:cNvPr>
+          <p:cNvSpPr/>
+          <p:nvPr/>
+        </p:nvSpPr>
+        <p:spPr>
+          <a:xfrm>
+            <a:off x="2380426" y="1708493"/>
+            <a:ext cx="7433530" cy="3986138"/>
+          </a:xfrm>
+          <a:prstGeom prst="rect">
+            <a:avLst/>
+          </a:prstGeom>
+          <a:noFill/>
+          <a:ln>
+            <a:noFill/>
+          </a:ln>
+        </p:spPr>
+        <p:style>
+          <a:lnRef idx="0">
+            <a:scrgbClr r="0" g="0" b="0"/>
+          </a:lnRef>
+          <a:fillRef idx="0">
+            <a:scrgbClr r="0" g="0" b="0"/>
+          </a:fillRef>
+          <a:effectRef idx="0">
+            <a:scrgbClr r="0" g="0" b="0"/>
+          </a:effectRef>
+          <a:fontRef idx="minor">
+            <a:schemeClr val="accent2"/>
+          </a:fontRef>
+        </p:style>
+        <p:txBody>
+          <a:bodyPr rtlCol="0" anchor="ctr"/>
+          <a:lstStyle/>
+          <a:p>
+            <a:pPr algn="ctr"/>
+            <a:endParaRPr lang="es-ES" dirty="0"/>
+          </a:p>
+        </p:txBody>
+      </p:sp>
+    </p:spTree>
+    <p:extLst>
+      <p:ext uri="{BB962C8B-B14F-4D97-AF65-F5344CB8AC3E}">
+        <p14:creationId xmlns:p14="http://schemas.microsoft.com/office/powerpoint/2010/main" val="3929078417"/>
+      </p:ext>
+    </p:extLst>
+  </p:cSld>
+  <p:clrMapOvr>
+    <a:masterClrMapping/>
+  </p:clrMapOvr>
+</p:sld>
+</file>
+
+<file path=ppt/slides/slide2.xml><?xml version="1.0" encoding="utf-8"?>
+<p:sld xmlns:a="http://schemas.openxmlformats.org/drawingml/2006/main" xmlns:r="http://schemas.openxmlformats.org/officeDocument/2006/relationships" xmlns:p="http://schemas.openxmlformats.org/presentationml/2006/main">
+  <p:cSld>
+    <p:spTree>
+      <p:nvGrpSpPr>
+        <p:cNvPr id="1" name=""/>
+        <p:cNvGrpSpPr/>
+        <p:nvPr/>
+      </p:nvGrpSpPr>
+      <p:grpSpPr>
+        <a:xfrm>
+          <a:off x="0" y="0"/>
+          <a:ext cx="0" cy="0"/>
+          <a:chOff x="0" y="0"/>
+          <a:chExt cx="0" cy="0"/>
+        </a:xfrm>
+      </p:grpSpPr>
+    </p:spTree>
+    <p:extLst>
+      <p:ext uri="{BB962C8B-B14F-4D97-AF65-F5344CB8AC3E}">
+        <p14:creationId xmlns:p14="http://schemas.microsoft.com/office/powerpoint/2010/main" val="3515240844"/>
+      </p:ext>
+    </p:extLst>
+  </p:cSld>
+  <p:clrMapOvr>
+    <a:masterClrMapping/>
+  </p:clrMapOvr>
+</p:sld>
+</file>
+
+<file path=ppt/slides/slide20.xml><?xml version="1.0" encoding="utf-8"?>
+<p:sld xmlns:a="http://schemas.openxmlformats.org/drawingml/2006/main" xmlns:r="http://schemas.openxmlformats.org/officeDocument/2006/relationships" xmlns:p="http://schemas.openxmlformats.org/presentationml/2006/main">
+  <p:cSld>
+    <p:spTree>
+      <p:nvGrpSpPr>
+        <p:cNvPr id="1" name=""/>
+        <p:cNvGrpSpPr/>
+        <p:nvPr/>
+      </p:nvGrpSpPr>
+      <p:grpSpPr>
+        <a:xfrm>
+          <a:off x="0" y="0"/>
+          <a:ext cx="0" cy="0"/>
+          <a:chOff x="0" y="0"/>
+          <a:chExt cx="0" cy="0"/>
+        </a:xfrm>
+      </p:grpSpPr>
+      <p:sp>
+        <p:nvSpPr>
+          <p:cNvPr id="2" name="imgMarco-D20">
+            <a:extLst>
+              <a:ext uri="{FF2B5EF4-FFF2-40B4-BE49-F238E27FC236}">
+                <a16:creationId xmlns:a16="http://schemas.microsoft.com/office/drawing/2014/main" id="{4987C106-B470-4050-9636-37C509873E46}"/>
+              </a:ext>
+            </a:extLst>
+          </p:cNvPr>
+          <p:cNvSpPr/>
+          <p:nvPr/>
+        </p:nvSpPr>
+        <p:spPr>
+          <a:xfrm>
+            <a:off x="4089149" y="2374440"/>
+            <a:ext cx="4013702" cy="3159316"/>
+          </a:xfrm>
+          <a:prstGeom prst="rect">
+            <a:avLst/>
+          </a:prstGeom>
+          <a:noFill/>
+          <a:ln>
+            <a:noFill/>
+          </a:ln>
+        </p:spPr>
+        <p:style>
+          <a:lnRef idx="0">
+            <a:scrgbClr r="0" g="0" b="0"/>
+          </a:lnRef>
+          <a:fillRef idx="0">
+            <a:scrgbClr r="0" g="0" b="0"/>
+          </a:fillRef>
+          <a:effectRef idx="0">
+            <a:scrgbClr r="0" g="0" b="0"/>
+          </a:effectRef>
+          <a:fontRef idx="minor">
+            <a:schemeClr val="accent2"/>
+          </a:fontRef>
+        </p:style>
+        <p:txBody>
+          <a:bodyPr rtlCol="0" anchor="ctr"/>
+          <a:lstStyle/>
+          <a:p>
+            <a:pPr algn="ctr"/>
+            <a:endParaRPr lang="es-ES" dirty="0"/>
+          </a:p>
+        </p:txBody>
+      </p:sp>
+    </p:spTree>
+    <p:extLst>
+      <p:ext uri="{BB962C8B-B14F-4D97-AF65-F5344CB8AC3E}">
+        <p14:creationId xmlns:p14="http://schemas.microsoft.com/office/powerpoint/2010/main" val="1715274958"/>
+      </p:ext>
+    </p:extLst>
+  </p:cSld>
+  <p:clrMapOvr>
+    <a:masterClrMapping/>
+  </p:clrMapOvr>
+</p:sld>
+</file>
+
+<file path=ppt/slides/slide21.xml><?xml version="1.0" encoding="utf-8"?>
+<p:sld xmlns:a="http://schemas.openxmlformats.org/drawingml/2006/main" xmlns:r="http://schemas.openxmlformats.org/officeDocument/2006/relationships" xmlns:p="http://schemas.openxmlformats.org/presentationml/2006/main">
+  <p:cSld>
+    <p:spTree>
+      <p:nvGrpSpPr>
+        <p:cNvPr id="1" name=""/>
+        <p:cNvGrpSpPr/>
+        <p:nvPr/>
+      </p:nvGrpSpPr>
+      <p:grpSpPr>
+        <a:xfrm>
+          <a:off x="0" y="0"/>
+          <a:ext cx="0" cy="0"/>
+          <a:chOff x="0" y="0"/>
+          <a:chExt cx="0" cy="0"/>
+        </a:xfrm>
+      </p:grpSpPr>
+      <p:sp>
+        <p:nvSpPr>
+          <p:cNvPr id="2" name="imgMarco-D21">
+            <a:extLst>
+              <a:ext uri="{FF2B5EF4-FFF2-40B4-BE49-F238E27FC236}">
+                <a16:creationId xmlns:a16="http://schemas.microsoft.com/office/drawing/2014/main" id="{465898D6-D4F9-4CF2-95C5-788600A6F925}"/>
               </a:ext>
             </a:extLst>
           </p:cNvPr>
@@ -18610,7 +18796,7 @@
     </p:spTree>
     <p:extLst>
       <p:ext uri="{BB962C8B-B14F-4D97-AF65-F5344CB8AC3E}">
-        <p14:creationId xmlns:p14="http://schemas.microsoft.com/office/powerpoint/2010/main" val="3888714159"/>
+        <p14:creationId xmlns:p14="http://schemas.microsoft.com/office/powerpoint/2010/main" val="2872294775"/>
       </p:ext>
     </p:extLst>
   </p:cSld>
@@ -18620,37 +18806,7 @@
 </p:sld>
 </file>
 
-<file path=ppt/slides/slide2.xml><?xml version="1.0" encoding="utf-8"?>
-<p:sld xmlns:a="http://schemas.openxmlformats.org/drawingml/2006/main" xmlns:r="http://schemas.openxmlformats.org/officeDocument/2006/relationships" xmlns:p="http://schemas.openxmlformats.org/presentationml/2006/main">
-  <p:cSld>
-    <p:spTree>
-      <p:nvGrpSpPr>
-        <p:cNvPr id="1" name=""/>
-        <p:cNvGrpSpPr/>
-        <p:nvPr/>
-      </p:nvGrpSpPr>
-      <p:grpSpPr>
-        <a:xfrm>
-          <a:off x="0" y="0"/>
-          <a:ext cx="0" cy="0"/>
-          <a:chOff x="0" y="0"/>
-          <a:chExt cx="0" cy="0"/>
-        </a:xfrm>
-      </p:grpSpPr>
-    </p:spTree>
-    <p:extLst>
-      <p:ext uri="{BB962C8B-B14F-4D97-AF65-F5344CB8AC3E}">
-        <p14:creationId xmlns:p14="http://schemas.microsoft.com/office/powerpoint/2010/main" val="3216676912"/>
-      </p:ext>
-    </p:extLst>
-  </p:cSld>
-  <p:clrMapOvr>
-    <a:masterClrMapping/>
-  </p:clrMapOvr>
-</p:sld>
-</file>
-
-<file path=ppt/slides/slide20.xml><?xml version="1.0" encoding="utf-8"?>
+<file path=ppt/slides/slide22.xml><?xml version="1.0" encoding="utf-8"?>
 <p:sld xmlns:a="http://schemas.openxmlformats.org/drawingml/2006/main" xmlns:r="http://schemas.openxmlformats.org/officeDocument/2006/relationships" xmlns:p="http://schemas.openxmlformats.org/presentationml/2006/main">
   <p:cSld>
     <p:spTree>
@@ -18669,88 +18825,10 @@
       </p:grpSpPr>
       <p:sp>
         <p:nvSpPr>
-          <p:cNvPr id="2" name="imgMarco-D20">
+          <p:cNvPr id="2" name="imgMarco-D22">
             <a:extLst>
               <a:ext uri="{FF2B5EF4-FFF2-40B4-BE49-F238E27FC236}">
-                <a16:creationId xmlns:a16="http://schemas.microsoft.com/office/drawing/2014/main" id="{BA91898A-ACB3-4402-80B4-244DB6F377AB}"/>
-              </a:ext>
-            </a:extLst>
-          </p:cNvPr>
-          <p:cNvSpPr/>
-          <p:nvPr/>
-        </p:nvSpPr>
-        <p:spPr>
-          <a:xfrm>
-            <a:off x="4182701" y="2181885"/>
-            <a:ext cx="3766242" cy="2643612"/>
-          </a:xfrm>
-          <a:prstGeom prst="rect">
-            <a:avLst/>
-          </a:prstGeom>
-          <a:noFill/>
-          <a:ln>
-            <a:noFill/>
-          </a:ln>
-        </p:spPr>
-        <p:style>
-          <a:lnRef idx="0">
-            <a:scrgbClr r="0" g="0" b="0"/>
-          </a:lnRef>
-          <a:fillRef idx="0">
-            <a:scrgbClr r="0" g="0" b="0"/>
-          </a:fillRef>
-          <a:effectRef idx="0">
-            <a:scrgbClr r="0" g="0" b="0"/>
-          </a:effectRef>
-          <a:fontRef idx="minor">
-            <a:schemeClr val="accent2"/>
-          </a:fontRef>
-        </p:style>
-        <p:txBody>
-          <a:bodyPr rtlCol="0" anchor="ctr"/>
-          <a:lstStyle/>
-          <a:p>
-            <a:pPr algn="ctr"/>
-            <a:endParaRPr lang="es-ES" dirty="0"/>
-          </a:p>
-        </p:txBody>
-      </p:sp>
-    </p:spTree>
-    <p:extLst>
-      <p:ext uri="{BB962C8B-B14F-4D97-AF65-F5344CB8AC3E}">
-        <p14:creationId xmlns:p14="http://schemas.microsoft.com/office/powerpoint/2010/main" val="798749002"/>
-      </p:ext>
-    </p:extLst>
-  </p:cSld>
-  <p:clrMapOvr>
-    <a:masterClrMapping/>
-  </p:clrMapOvr>
-</p:sld>
-</file>
-
-<file path=ppt/slides/slide21.xml><?xml version="1.0" encoding="utf-8"?>
-<p:sld xmlns:a="http://schemas.openxmlformats.org/drawingml/2006/main" xmlns:r="http://schemas.openxmlformats.org/officeDocument/2006/relationships" xmlns:p="http://schemas.openxmlformats.org/presentationml/2006/main">
-  <p:cSld>
-    <p:spTree>
-      <p:nvGrpSpPr>
-        <p:cNvPr id="1" name=""/>
-        <p:cNvGrpSpPr/>
-        <p:nvPr/>
-      </p:nvGrpSpPr>
-      <p:grpSpPr>
-        <a:xfrm>
-          <a:off x="0" y="0"/>
-          <a:ext cx="0" cy="0"/>
-          <a:chOff x="0" y="0"/>
-          <a:chExt cx="0" cy="0"/>
-        </a:xfrm>
-      </p:grpSpPr>
-      <p:sp>
-        <p:nvSpPr>
-          <p:cNvPr id="2" name="imgMarco-D21">
-            <a:extLst>
-              <a:ext uri="{FF2B5EF4-FFF2-40B4-BE49-F238E27FC236}">
-                <a16:creationId xmlns:a16="http://schemas.microsoft.com/office/drawing/2014/main" id="{987F2003-8B12-44E6-97A6-03550B99F618}"/>
+                <a16:creationId xmlns:a16="http://schemas.microsoft.com/office/drawing/2014/main" id="{76649B03-67B1-4161-B021-44C2713FF3F9}"/>
               </a:ext>
             </a:extLst>
           </p:cNvPr>
@@ -18796,7 +18874,7 @@
     </p:spTree>
     <p:extLst>
       <p:ext uri="{BB962C8B-B14F-4D97-AF65-F5344CB8AC3E}">
-        <p14:creationId xmlns:p14="http://schemas.microsoft.com/office/powerpoint/2010/main" val="2773728894"/>
+        <p14:creationId xmlns:p14="http://schemas.microsoft.com/office/powerpoint/2010/main" val="1614150350"/>
       </p:ext>
     </p:extLst>
   </p:cSld>
@@ -18806,7 +18884,7 @@
 </p:sld>
 </file>
 
-<file path=ppt/slides/slide22.xml><?xml version="1.0" encoding="utf-8"?>
+<file path=ppt/slides/slide23.xml><?xml version="1.0" encoding="utf-8"?>
 <p:sld xmlns:a="http://schemas.openxmlformats.org/drawingml/2006/main" xmlns:r="http://schemas.openxmlformats.org/officeDocument/2006/relationships" xmlns:p="http://schemas.openxmlformats.org/presentationml/2006/main">
   <p:cSld>
     <p:spTree>
@@ -18825,10 +18903,10 @@
       </p:grpSpPr>
       <p:sp>
         <p:nvSpPr>
-          <p:cNvPr id="2" name="imgMarco-D22">
+          <p:cNvPr id="2" name="imgMarco-D23">
             <a:extLst>
               <a:ext uri="{FF2B5EF4-FFF2-40B4-BE49-F238E27FC236}">
-                <a16:creationId xmlns:a16="http://schemas.microsoft.com/office/drawing/2014/main" id="{019BFCBB-67F8-40FD-AE2C-32487C45C327}"/>
+                <a16:creationId xmlns:a16="http://schemas.microsoft.com/office/drawing/2014/main" id="{FFF7F94C-2295-4923-BEB7-5618A5450E21}"/>
               </a:ext>
             </a:extLst>
           </p:cNvPr>
@@ -18837,8 +18915,8 @@
         </p:nvSpPr>
         <p:spPr>
           <a:xfrm>
-            <a:off x="1177619" y="1831019"/>
-            <a:ext cx="9839144" cy="3195963"/>
+            <a:off x="1177619" y="1351029"/>
+            <a:ext cx="9839144" cy="4701065"/>
           </a:xfrm>
           <a:prstGeom prst="rect">
             <a:avLst/>
@@ -18874,7 +18952,7 @@
     </p:spTree>
     <p:extLst>
       <p:ext uri="{BB962C8B-B14F-4D97-AF65-F5344CB8AC3E}">
-        <p14:creationId xmlns:p14="http://schemas.microsoft.com/office/powerpoint/2010/main" val="834946948"/>
+        <p14:creationId xmlns:p14="http://schemas.microsoft.com/office/powerpoint/2010/main" val="368052305"/>
       </p:ext>
     </p:extLst>
   </p:cSld>
@@ -18884,7 +18962,7 @@
 </p:sld>
 </file>
 
-<file path=ppt/slides/slide23.xml><?xml version="1.0" encoding="utf-8"?>
+<file path=ppt/slides/slide24.xml><?xml version="1.0" encoding="utf-8"?>
 <p:sld xmlns:a="http://schemas.openxmlformats.org/drawingml/2006/main" xmlns:r="http://schemas.openxmlformats.org/officeDocument/2006/relationships" xmlns:p="http://schemas.openxmlformats.org/presentationml/2006/main">
   <p:cSld>
     <p:spTree>
@@ -18903,10 +18981,10 @@
       </p:grpSpPr>
       <p:sp>
         <p:nvSpPr>
-          <p:cNvPr id="2" name="imgMarco-D23">
+          <p:cNvPr id="2" name="imgMarco-D24">
             <a:extLst>
               <a:ext uri="{FF2B5EF4-FFF2-40B4-BE49-F238E27FC236}">
-                <a16:creationId xmlns:a16="http://schemas.microsoft.com/office/drawing/2014/main" id="{BE5FFB58-03B9-4FB5-ACCA-88D01988001A}"/>
+                <a16:creationId xmlns:a16="http://schemas.microsoft.com/office/drawing/2014/main" id="{ABB84856-CEEF-499F-8FA6-FA35AC5A94D9}"/>
               </a:ext>
             </a:extLst>
           </p:cNvPr>
@@ -18915,8 +18993,8 @@
         </p:nvSpPr>
         <p:spPr>
           <a:xfrm>
-            <a:off x="1177619" y="1475760"/>
-            <a:ext cx="9839144" cy="4377256"/>
+            <a:off x="1177619" y="1351029"/>
+            <a:ext cx="9839144" cy="4701065"/>
           </a:xfrm>
           <a:prstGeom prst="rect">
             <a:avLst/>
@@ -18952,7 +19030,7 @@
     </p:spTree>
     <p:extLst>
       <p:ext uri="{BB962C8B-B14F-4D97-AF65-F5344CB8AC3E}">
-        <p14:creationId xmlns:p14="http://schemas.microsoft.com/office/powerpoint/2010/main" val="466425291"/>
+        <p14:creationId xmlns:p14="http://schemas.microsoft.com/office/powerpoint/2010/main" val="3328370862"/>
       </p:ext>
     </p:extLst>
   </p:cSld>
@@ -18962,7 +19040,7 @@
 </p:sld>
 </file>
 
-<file path=ppt/slides/slide24.xml><?xml version="1.0" encoding="utf-8"?>
+<file path=ppt/slides/slide25.xml><?xml version="1.0" encoding="utf-8"?>
 <p:sld xmlns:a="http://schemas.openxmlformats.org/drawingml/2006/main" xmlns:r="http://schemas.openxmlformats.org/officeDocument/2006/relationships" xmlns:p="http://schemas.openxmlformats.org/presentationml/2006/main">
   <p:cSld>
     <p:spTree>
@@ -18981,10 +19059,10 @@
       </p:grpSpPr>
       <p:sp>
         <p:nvSpPr>
-          <p:cNvPr id="2" name="imgMarco-D24">
+          <p:cNvPr id="2" name="imgMarco-D25">
             <a:extLst>
               <a:ext uri="{FF2B5EF4-FFF2-40B4-BE49-F238E27FC236}">
-                <a16:creationId xmlns:a16="http://schemas.microsoft.com/office/drawing/2014/main" id="{4FE51E9E-FCF4-467C-9F8D-B57B6C72C924}"/>
+                <a16:creationId xmlns:a16="http://schemas.microsoft.com/office/drawing/2014/main" id="{E0D170BE-AB4B-4C71-B5FC-3E2670E2B7D8}"/>
               </a:ext>
             </a:extLst>
           </p:cNvPr>
@@ -18993,8 +19071,8 @@
         </p:nvSpPr>
         <p:spPr>
           <a:xfrm>
-            <a:off x="1177619" y="1279852"/>
-            <a:ext cx="9839144" cy="4298297"/>
+            <a:off x="1177619" y="2595764"/>
+            <a:ext cx="9839144" cy="1666472"/>
           </a:xfrm>
           <a:prstGeom prst="rect">
             <a:avLst/>
@@ -19030,7 +19108,7 @@
     </p:spTree>
     <p:extLst>
       <p:ext uri="{BB962C8B-B14F-4D97-AF65-F5344CB8AC3E}">
-        <p14:creationId xmlns:p14="http://schemas.microsoft.com/office/powerpoint/2010/main" val="3876267802"/>
+        <p14:creationId xmlns:p14="http://schemas.microsoft.com/office/powerpoint/2010/main" val="3984208719"/>
       </p:ext>
     </p:extLst>
   </p:cSld>
@@ -19040,7 +19118,7 @@
 </p:sld>
 </file>
 
-<file path=ppt/slides/slide25.xml><?xml version="1.0" encoding="utf-8"?>
+<file path=ppt/slides/slide26.xml><?xml version="1.0" encoding="utf-8"?>
 <p:sld xmlns:a="http://schemas.openxmlformats.org/drawingml/2006/main" xmlns:r="http://schemas.openxmlformats.org/officeDocument/2006/relationships" xmlns:p="http://schemas.openxmlformats.org/presentationml/2006/main">
   <p:cSld>
     <p:spTree>
@@ -19059,10 +19137,10 @@
       </p:grpSpPr>
       <p:sp>
         <p:nvSpPr>
-          <p:cNvPr id="2" name="imgMarco-D25">
+          <p:cNvPr id="2" name="txt-D26">
             <a:extLst>
               <a:ext uri="{FF2B5EF4-FFF2-40B4-BE49-F238E27FC236}">
-                <a16:creationId xmlns:a16="http://schemas.microsoft.com/office/drawing/2014/main" id="{9D814499-71AD-445E-BE2E-5EBC699D3C4A}"/>
+                <a16:creationId xmlns:a16="http://schemas.microsoft.com/office/drawing/2014/main" id="{1AC9B5FB-6F34-42A6-8180-00EA363E0B77}"/>
               </a:ext>
             </a:extLst>
           </p:cNvPr>
@@ -19071,8 +19149,502 @@
         </p:nvSpPr>
         <p:spPr>
           <a:xfrm>
-            <a:off x="1199728" y="2595764"/>
-            <a:ext cx="9792544" cy="1666472"/>
+            <a:off x="1062952" y="1315946"/>
+            <a:ext cx="5033048" cy="369332"/>
+          </a:xfrm>
+          <a:prstGeom prst="rect">
+            <a:avLst/>
+          </a:prstGeom>
+        </p:spPr>
+        <p:txBody>
+          <a:bodyPr wrap="square">
+            <a:spAutoFit/>
+          </a:bodyPr>
+          <a:lstStyle/>
+          <a:p>
+            <a:endParaRPr lang="es-CO" dirty="0"/>
+          </a:p>
+        </p:txBody>
+      </p:sp>
+    </p:spTree>
+    <p:extLst>
+      <p:ext uri="{BB962C8B-B14F-4D97-AF65-F5344CB8AC3E}">
+        <p14:creationId xmlns:p14="http://schemas.microsoft.com/office/powerpoint/2010/main" val="4183361174"/>
+      </p:ext>
+    </p:extLst>
+  </p:cSld>
+  <p:clrMapOvr>
+    <a:masterClrMapping/>
+  </p:clrMapOvr>
+</p:sld>
+</file>
+
+<file path=ppt/slides/slide27.xml><?xml version="1.0" encoding="utf-8"?>
+<p:sld xmlns:a="http://schemas.openxmlformats.org/drawingml/2006/main" xmlns:r="http://schemas.openxmlformats.org/officeDocument/2006/relationships" xmlns:p="http://schemas.openxmlformats.org/presentationml/2006/main">
+  <p:cSld>
+    <p:spTree>
+      <p:nvGrpSpPr>
+        <p:cNvPr id="1" name=""/>
+        <p:cNvGrpSpPr/>
+        <p:nvPr/>
+      </p:nvGrpSpPr>
+      <p:grpSpPr>
+        <a:xfrm>
+          <a:off x="0" y="0"/>
+          <a:ext cx="0" cy="0"/>
+          <a:chOff x="0" y="0"/>
+          <a:chExt cx="0" cy="0"/>
+        </a:xfrm>
+      </p:grpSpPr>
+    </p:spTree>
+    <p:extLst>
+      <p:ext uri="{BB962C8B-B14F-4D97-AF65-F5344CB8AC3E}">
+        <p14:creationId xmlns:p14="http://schemas.microsoft.com/office/powerpoint/2010/main" val="1439336978"/>
+      </p:ext>
+    </p:extLst>
+  </p:cSld>
+  <p:clrMapOvr>
+    <a:masterClrMapping/>
+  </p:clrMapOvr>
+</p:sld>
+</file>
+
+<file path=ppt/slides/slide28.xml><?xml version="1.0" encoding="utf-8"?>
+<p:sld xmlns:a="http://schemas.openxmlformats.org/drawingml/2006/main" xmlns:r="http://schemas.openxmlformats.org/officeDocument/2006/relationships" xmlns:p="http://schemas.openxmlformats.org/presentationml/2006/main">
+  <p:cSld>
+    <p:spTree>
+      <p:nvGrpSpPr>
+        <p:cNvPr id="1" name=""/>
+        <p:cNvGrpSpPr/>
+        <p:nvPr/>
+      </p:nvGrpSpPr>
+      <p:grpSpPr>
+        <a:xfrm>
+          <a:off x="0" y="0"/>
+          <a:ext cx="0" cy="0"/>
+          <a:chOff x="0" y="0"/>
+          <a:chExt cx="0" cy="0"/>
+        </a:xfrm>
+      </p:grpSpPr>
+    </p:spTree>
+    <p:extLst>
+      <p:ext uri="{BB962C8B-B14F-4D97-AF65-F5344CB8AC3E}">
+        <p14:creationId xmlns:p14="http://schemas.microsoft.com/office/powerpoint/2010/main" val="3617583337"/>
+      </p:ext>
+    </p:extLst>
+  </p:cSld>
+  <p:clrMapOvr>
+    <a:masterClrMapping/>
+  </p:clrMapOvr>
+</p:sld>
+</file>
+
+<file path=ppt/slides/slide3.xml><?xml version="1.0" encoding="utf-8"?>
+<p:sld xmlns:a="http://schemas.openxmlformats.org/drawingml/2006/main" xmlns:r="http://schemas.openxmlformats.org/officeDocument/2006/relationships" xmlns:p="http://schemas.openxmlformats.org/presentationml/2006/main">
+  <p:cSld>
+    <p:spTree>
+      <p:nvGrpSpPr>
+        <p:cNvPr id="1" name=""/>
+        <p:cNvGrpSpPr/>
+        <p:nvPr/>
+      </p:nvGrpSpPr>
+      <p:grpSpPr>
+        <a:xfrm>
+          <a:off x="0" y="0"/>
+          <a:ext cx="0" cy="0"/>
+          <a:chOff x="0" y="0"/>
+          <a:chExt cx="0" cy="0"/>
+        </a:xfrm>
+      </p:grpSpPr>
+      <p:sp>
+        <p:nvSpPr>
+          <p:cNvPr id="2" name="imgMarco-D3">
+            <a:extLst>
+              <a:ext uri="{FF2B5EF4-FFF2-40B4-BE49-F238E27FC236}">
+                <a16:creationId xmlns:a16="http://schemas.microsoft.com/office/drawing/2014/main" id="{CC7B89A7-A484-4E1E-BCB8-759EB5BC9F64}"/>
+              </a:ext>
+            </a:extLst>
+          </p:cNvPr>
+          <p:cNvSpPr/>
+          <p:nvPr/>
+        </p:nvSpPr>
+        <p:spPr>
+          <a:xfrm>
+            <a:off x="6104635" y="1778000"/>
+            <a:ext cx="5031678" cy="3096001"/>
+          </a:xfrm>
+          <a:prstGeom prst="rect">
+            <a:avLst/>
+          </a:prstGeom>
+          <a:noFill/>
+          <a:ln>
+            <a:noFill/>
+          </a:ln>
+        </p:spPr>
+        <p:style>
+          <a:lnRef idx="0">
+            <a:scrgbClr r="0" g="0" b="0"/>
+          </a:lnRef>
+          <a:fillRef idx="0">
+            <a:scrgbClr r="0" g="0" b="0"/>
+          </a:fillRef>
+          <a:effectRef idx="0">
+            <a:scrgbClr r="0" g="0" b="0"/>
+          </a:effectRef>
+          <a:fontRef idx="minor">
+            <a:schemeClr val="accent2"/>
+          </a:fontRef>
+        </p:style>
+        <p:txBody>
+          <a:bodyPr rtlCol="0" anchor="ctr"/>
+          <a:lstStyle/>
+          <a:p>
+            <a:pPr algn="ctr"/>
+            <a:endParaRPr lang="es-ES" dirty="0"/>
+          </a:p>
+        </p:txBody>
+      </p:sp>
+      <p:sp>
+        <p:nvSpPr>
+          <p:cNvPr id="3" name="MEBOG">
+            <a:extLst>
+              <a:ext uri="{FF2B5EF4-FFF2-40B4-BE49-F238E27FC236}">
+                <a16:creationId xmlns:a16="http://schemas.microsoft.com/office/drawing/2014/main" id="{B7948871-7088-40DD-87EF-3EEA24F80741}"/>
+              </a:ext>
+            </a:extLst>
+          </p:cNvPr>
+          <p:cNvSpPr/>
+          <p:nvPr/>
+        </p:nvSpPr>
+        <p:spPr>
+          <a:xfrm>
+            <a:off x="1330324" y="5689090"/>
+            <a:ext cx="1243797" cy="430887"/>
+          </a:xfrm>
+          <a:prstGeom prst="rect">
+            <a:avLst/>
+          </a:prstGeom>
+        </p:spPr>
+        <p:txBody>
+          <a:bodyPr wrap="square" anchor="ctr">
+            <a:spAutoFit/>
+          </a:bodyPr>
+          <a:lstStyle/>
+          <a:p>
+            <a:pPr marL="22860" marR="5080">
+              <a:lnSpc>
+                <a:spcPct val="154100"/>
+              </a:lnSpc>
+              <a:spcBef>
+                <a:spcPts val="950"/>
+              </a:spcBef>
+            </a:pPr>
+            <a:r>
+              <a:rPr lang="es-MX" sz="1600" dirty="0">
+                <a:solidFill>
+                  <a:srgbClr val="7E7E7E"/>
+                </a:solidFill>
+                <a:latin typeface="Calibri" panose="020F0502020204030204" pitchFamily="34" charset="0"/>
+                <a:cs typeface="Calibri"/>
+              </a:rPr>
+              <a:t>MEBOG: </a:t>
+            </a:r>
+          </a:p>
+        </p:txBody>
+      </p:sp>
+      <p:sp>
+        <p:nvSpPr>
+          <p:cNvPr id="4" name="BOMBEROS">
+            <a:extLst>
+              <a:ext uri="{FF2B5EF4-FFF2-40B4-BE49-F238E27FC236}">
+                <a16:creationId xmlns:a16="http://schemas.microsoft.com/office/drawing/2014/main" id="{3634355A-782F-4057-9BAB-ADC1FABE7C79}"/>
+              </a:ext>
+            </a:extLst>
+          </p:cNvPr>
+          <p:cNvSpPr/>
+          <p:nvPr/>
+        </p:nvSpPr>
+        <p:spPr>
+          <a:xfrm>
+            <a:off x="1330324" y="5258203"/>
+            <a:ext cx="1243797" cy="430887"/>
+          </a:xfrm>
+          <a:prstGeom prst="rect">
+            <a:avLst/>
+          </a:prstGeom>
+        </p:spPr>
+        <p:txBody>
+          <a:bodyPr wrap="square" anchor="ctr">
+            <a:spAutoFit/>
+          </a:bodyPr>
+          <a:lstStyle/>
+          <a:p>
+            <a:pPr marL="22860" marR="5080">
+              <a:lnSpc>
+                <a:spcPct val="154100"/>
+              </a:lnSpc>
+              <a:spcBef>
+                <a:spcPts val="950"/>
+              </a:spcBef>
+            </a:pPr>
+            <a:r>
+              <a:rPr lang="es-MX" sz="1600" dirty="0">
+                <a:solidFill>
+                  <a:srgbClr val="7E7E7E"/>
+                </a:solidFill>
+                <a:latin typeface="Calibri" panose="020F0502020204030204" pitchFamily="34" charset="0"/>
+                <a:cs typeface="Calibri"/>
+              </a:rPr>
+              <a:t>BOMBEROS: </a:t>
+            </a:r>
+          </a:p>
+        </p:txBody>
+      </p:sp>
+      <p:sp>
+        <p:nvSpPr>
+          <p:cNvPr id="5" name="IDIGER">
+            <a:extLst>
+              <a:ext uri="{FF2B5EF4-FFF2-40B4-BE49-F238E27FC236}">
+                <a16:creationId xmlns:a16="http://schemas.microsoft.com/office/drawing/2014/main" id="{FE872EA5-C9A8-4551-9AD7-334483609113}"/>
+              </a:ext>
+            </a:extLst>
+          </p:cNvPr>
+          <p:cNvSpPr/>
+          <p:nvPr/>
+        </p:nvSpPr>
+        <p:spPr>
+          <a:xfrm>
+            <a:off x="1330324" y="4801958"/>
+            <a:ext cx="1249914" cy="430887"/>
+          </a:xfrm>
+          <a:prstGeom prst="rect">
+            <a:avLst/>
+          </a:prstGeom>
+        </p:spPr>
+        <p:txBody>
+          <a:bodyPr wrap="square" anchor="ctr">
+            <a:spAutoFit/>
+          </a:bodyPr>
+          <a:lstStyle/>
+          <a:p>
+            <a:pPr marL="22860" marR="5080">
+              <a:lnSpc>
+                <a:spcPct val="154100"/>
+              </a:lnSpc>
+              <a:spcBef>
+                <a:spcPts val="950"/>
+              </a:spcBef>
+            </a:pPr>
+            <a:r>
+              <a:rPr lang="es-MX" sz="1600" dirty="0">
+                <a:solidFill>
+                  <a:srgbClr val="7E7E7E"/>
+                </a:solidFill>
+                <a:latin typeface="Calibri" panose="020F0502020204030204" pitchFamily="34" charset="0"/>
+                <a:cs typeface="Calibri"/>
+              </a:rPr>
+              <a:t>IDIGER: </a:t>
+            </a:r>
+          </a:p>
+        </p:txBody>
+      </p:sp>
+      <p:sp>
+        <p:nvSpPr>
+          <p:cNvPr id="6" name="MOVILIDAD">
+            <a:extLst>
+              <a:ext uri="{FF2B5EF4-FFF2-40B4-BE49-F238E27FC236}">
+                <a16:creationId xmlns:a16="http://schemas.microsoft.com/office/drawing/2014/main" id="{0C281131-28F7-40B9-8EDF-1EEA314D4B81}"/>
+              </a:ext>
+            </a:extLst>
+          </p:cNvPr>
+          <p:cNvSpPr/>
+          <p:nvPr/>
+        </p:nvSpPr>
+        <p:spPr>
+          <a:xfrm>
+            <a:off x="1330325" y="4366914"/>
+            <a:ext cx="1249914" cy="430887"/>
+          </a:xfrm>
+          <a:prstGeom prst="rect">
+            <a:avLst/>
+          </a:prstGeom>
+        </p:spPr>
+        <p:txBody>
+          <a:bodyPr wrap="square">
+            <a:spAutoFit/>
+          </a:bodyPr>
+          <a:lstStyle/>
+          <a:p>
+            <a:pPr marL="22860" marR="5080">
+              <a:lnSpc>
+                <a:spcPct val="154100"/>
+              </a:lnSpc>
+              <a:spcBef>
+                <a:spcPts val="950"/>
+              </a:spcBef>
+            </a:pPr>
+            <a:r>
+              <a:rPr lang="es-MX" sz="1600" dirty="0">
+                <a:solidFill>
+                  <a:srgbClr val="7E7E7E"/>
+                </a:solidFill>
+                <a:latin typeface="Calibri" panose="020F0502020204030204" pitchFamily="34" charset="0"/>
+                <a:cs typeface="Calibri"/>
+              </a:rPr>
+              <a:t>MOVILIDAD: </a:t>
+            </a:r>
+          </a:p>
+        </p:txBody>
+      </p:sp>
+      <p:sp>
+        <p:nvSpPr>
+          <p:cNvPr id="7" name="CRUE">
+            <a:extLst>
+              <a:ext uri="{FF2B5EF4-FFF2-40B4-BE49-F238E27FC236}">
+                <a16:creationId xmlns:a16="http://schemas.microsoft.com/office/drawing/2014/main" id="{9EB834A4-8733-4B75-A1F6-FB9E57BDF7AD}"/>
+              </a:ext>
+            </a:extLst>
+          </p:cNvPr>
+          <p:cNvSpPr/>
+          <p:nvPr/>
+        </p:nvSpPr>
+        <p:spPr>
+          <a:xfrm>
+            <a:off x="1330325" y="3936027"/>
+            <a:ext cx="1249914" cy="430887"/>
+          </a:xfrm>
+          <a:prstGeom prst="rect">
+            <a:avLst/>
+          </a:prstGeom>
+        </p:spPr>
+        <p:txBody>
+          <a:bodyPr wrap="square">
+            <a:spAutoFit/>
+          </a:bodyPr>
+          <a:lstStyle/>
+          <a:p>
+            <a:pPr marL="22860" marR="5080">
+              <a:lnSpc>
+                <a:spcPct val="154100"/>
+              </a:lnSpc>
+              <a:spcBef>
+                <a:spcPts val="950"/>
+              </a:spcBef>
+            </a:pPr>
+            <a:r>
+              <a:rPr lang="es-MX" sz="1600" dirty="0">
+                <a:solidFill>
+                  <a:srgbClr val="7E7E7E"/>
+                </a:solidFill>
+                <a:latin typeface="Calibri" panose="020F0502020204030204" pitchFamily="34" charset="0"/>
+                <a:cs typeface="Calibri"/>
+              </a:rPr>
+              <a:t>CRUE: </a:t>
+            </a:r>
+          </a:p>
+        </p:txBody>
+      </p:sp>
+      <p:sp>
+        <p:nvSpPr>
+          <p:cNvPr id="8" name="SUR">
+            <a:extLst>
+              <a:ext uri="{FF2B5EF4-FFF2-40B4-BE49-F238E27FC236}">
+                <a16:creationId xmlns:a16="http://schemas.microsoft.com/office/drawing/2014/main" id="{78AAD3F7-948A-469A-BA42-702FEEBCD2F7}"/>
+              </a:ext>
+            </a:extLst>
+          </p:cNvPr>
+          <p:cNvSpPr/>
+          <p:nvPr/>
+        </p:nvSpPr>
+        <p:spPr>
+          <a:xfrm>
+            <a:off x="1330324" y="3513932"/>
+            <a:ext cx="1239881" cy="430887"/>
+          </a:xfrm>
+          <a:prstGeom prst="rect">
+            <a:avLst/>
+          </a:prstGeom>
+        </p:spPr>
+        <p:txBody>
+          <a:bodyPr wrap="square">
+            <a:spAutoFit/>
+          </a:bodyPr>
+          <a:lstStyle/>
+          <a:p>
+            <a:pPr marL="22860" marR="5080">
+              <a:lnSpc>
+                <a:spcPct val="154100"/>
+              </a:lnSpc>
+              <a:spcBef>
+                <a:spcPts val="950"/>
+              </a:spcBef>
+            </a:pPr>
+            <a:r>
+              <a:rPr lang="es-ES" altLang="zh-TW" sz="1600" dirty="0">
+                <a:solidFill>
+                  <a:srgbClr val="7E7E7E"/>
+                </a:solidFill>
+                <a:latin typeface="Calibri" panose="020F0502020204030204" pitchFamily="34" charset="0"/>
+                <a:cs typeface="Calibri"/>
+              </a:rPr>
+              <a:t>SUR:</a:t>
+            </a:r>
+            <a:endParaRPr lang="es-MX" sz="1600" dirty="0">
+              <a:solidFill>
+                <a:srgbClr val="7E7E7E"/>
+              </a:solidFill>
+              <a:latin typeface="Calibri" panose="020F0502020204030204" pitchFamily="34" charset="0"/>
+              <a:cs typeface="Calibri"/>
+            </a:endParaRPr>
+          </a:p>
+        </p:txBody>
+      </p:sp>
+    </p:spTree>
+    <p:extLst>
+      <p:ext uri="{BB962C8B-B14F-4D97-AF65-F5344CB8AC3E}">
+        <p14:creationId xmlns:p14="http://schemas.microsoft.com/office/powerpoint/2010/main" val="3076560073"/>
+      </p:ext>
+    </p:extLst>
+  </p:cSld>
+  <p:clrMapOvr>
+    <a:masterClrMapping/>
+  </p:clrMapOvr>
+</p:sld>
+</file>
+
+<file path=ppt/slides/slide4.xml><?xml version="1.0" encoding="utf-8"?>
+<p:sld xmlns:a="http://schemas.openxmlformats.org/drawingml/2006/main" xmlns:r="http://schemas.openxmlformats.org/officeDocument/2006/relationships" xmlns:p="http://schemas.openxmlformats.org/presentationml/2006/main">
+  <p:cSld>
+    <p:spTree>
+      <p:nvGrpSpPr>
+        <p:cNvPr id="1" name=""/>
+        <p:cNvGrpSpPr/>
+        <p:nvPr/>
+      </p:nvGrpSpPr>
+      <p:grpSpPr>
+        <a:xfrm>
+          <a:off x="0" y="0"/>
+          <a:ext cx="0" cy="0"/>
+          <a:chOff x="0" y="0"/>
+          <a:chExt cx="0" cy="0"/>
+        </a:xfrm>
+      </p:grpSpPr>
+      <p:sp>
+        <p:nvSpPr>
+          <p:cNvPr id="2" name="imgMarco-D4">
+            <a:extLst>
+              <a:ext uri="{FF2B5EF4-FFF2-40B4-BE49-F238E27FC236}">
+                <a16:creationId xmlns:a16="http://schemas.microsoft.com/office/drawing/2014/main" id="{18C62186-E1C7-46C8-8C9F-F48B9820CD4E}"/>
+              </a:ext>
+            </a:extLst>
+          </p:cNvPr>
+          <p:cNvSpPr/>
+          <p:nvPr/>
+        </p:nvSpPr>
+        <p:spPr>
+          <a:xfrm>
+            <a:off x="1261586" y="1436460"/>
+            <a:ext cx="9668828" cy="4537530"/>
           </a:xfrm>
           <a:prstGeom prst="rect">
             <a:avLst/>
@@ -19108,7 +19680,7 @@
     </p:spTree>
     <p:extLst>
       <p:ext uri="{BB962C8B-B14F-4D97-AF65-F5344CB8AC3E}">
-        <p14:creationId xmlns:p14="http://schemas.microsoft.com/office/powerpoint/2010/main" val="692154029"/>
+        <p14:creationId xmlns:p14="http://schemas.microsoft.com/office/powerpoint/2010/main" val="1959012272"/>
       </p:ext>
     </p:extLst>
   </p:cSld>
@@ -19118,97 +19690,7 @@
 </p:sld>
 </file>
 
-<file path=ppt/slides/slide26.xml><?xml version="1.0" encoding="utf-8"?>
-<p:sld xmlns:a="http://schemas.openxmlformats.org/drawingml/2006/main" xmlns:r="http://schemas.openxmlformats.org/officeDocument/2006/relationships" xmlns:p="http://schemas.openxmlformats.org/presentationml/2006/main">
-  <p:cSld>
-    <p:spTree>
-      <p:nvGrpSpPr>
-        <p:cNvPr id="1" name=""/>
-        <p:cNvGrpSpPr/>
-        <p:nvPr/>
-      </p:nvGrpSpPr>
-      <p:grpSpPr>
-        <a:xfrm>
-          <a:off x="0" y="0"/>
-          <a:ext cx="0" cy="0"/>
-          <a:chOff x="0" y="0"/>
-          <a:chExt cx="0" cy="0"/>
-        </a:xfrm>
-      </p:grpSpPr>
-    </p:spTree>
-    <p:extLst>
-      <p:ext uri="{BB962C8B-B14F-4D97-AF65-F5344CB8AC3E}">
-        <p14:creationId xmlns:p14="http://schemas.microsoft.com/office/powerpoint/2010/main" val="4265366095"/>
-      </p:ext>
-    </p:extLst>
-  </p:cSld>
-  <p:clrMapOvr>
-    <a:masterClrMapping/>
-  </p:clrMapOvr>
-</p:sld>
-</file>
-
-<file path=ppt/slides/slide27.xml><?xml version="1.0" encoding="utf-8"?>
-<p:sld xmlns:a="http://schemas.openxmlformats.org/drawingml/2006/main" xmlns:r="http://schemas.openxmlformats.org/officeDocument/2006/relationships" xmlns:p="http://schemas.openxmlformats.org/presentationml/2006/main">
-  <p:cSld>
-    <p:spTree>
-      <p:nvGrpSpPr>
-        <p:cNvPr id="1" name=""/>
-        <p:cNvGrpSpPr/>
-        <p:nvPr/>
-      </p:nvGrpSpPr>
-      <p:grpSpPr>
-        <a:xfrm>
-          <a:off x="0" y="0"/>
-          <a:ext cx="0" cy="0"/>
-          <a:chOff x="0" y="0"/>
-          <a:chExt cx="0" cy="0"/>
-        </a:xfrm>
-      </p:grpSpPr>
-    </p:spTree>
-    <p:extLst>
-      <p:ext uri="{BB962C8B-B14F-4D97-AF65-F5344CB8AC3E}">
-        <p14:creationId xmlns:p14="http://schemas.microsoft.com/office/powerpoint/2010/main" val="1899817994"/>
-      </p:ext>
-    </p:extLst>
-  </p:cSld>
-  <p:clrMapOvr>
-    <a:masterClrMapping/>
-  </p:clrMapOvr>
-</p:sld>
-</file>
-
-<file path=ppt/slides/slide28.xml><?xml version="1.0" encoding="utf-8"?>
-<p:sld xmlns:a="http://schemas.openxmlformats.org/drawingml/2006/main" xmlns:r="http://schemas.openxmlformats.org/officeDocument/2006/relationships" xmlns:p="http://schemas.openxmlformats.org/presentationml/2006/main">
-  <p:cSld>
-    <p:spTree>
-      <p:nvGrpSpPr>
-        <p:cNvPr id="1" name=""/>
-        <p:cNvGrpSpPr/>
-        <p:nvPr/>
-      </p:nvGrpSpPr>
-      <p:grpSpPr>
-        <a:xfrm>
-          <a:off x="0" y="0"/>
-          <a:ext cx="0" cy="0"/>
-          <a:chOff x="0" y="0"/>
-          <a:chExt cx="0" cy="0"/>
-        </a:xfrm>
-      </p:grpSpPr>
-    </p:spTree>
-    <p:extLst>
-      <p:ext uri="{BB962C8B-B14F-4D97-AF65-F5344CB8AC3E}">
-        <p14:creationId xmlns:p14="http://schemas.microsoft.com/office/powerpoint/2010/main" val="836477914"/>
-      </p:ext>
-    </p:extLst>
-  </p:cSld>
-  <p:clrMapOvr>
-    <a:masterClrMapping/>
-  </p:clrMapOvr>
-</p:sld>
-</file>
-
-<file path=ppt/slides/slide3.xml><?xml version="1.0" encoding="utf-8"?>
+<file path=ppt/slides/slide5.xml><?xml version="1.0" encoding="utf-8"?>
 <p:sld xmlns:a="http://schemas.openxmlformats.org/drawingml/2006/main" xmlns:r="http://schemas.openxmlformats.org/officeDocument/2006/relationships" xmlns:p="http://schemas.openxmlformats.org/presentationml/2006/main">
   <p:cSld>
     <p:spTree>
@@ -19227,10 +19709,10 @@
       </p:grpSpPr>
       <p:sp>
         <p:nvSpPr>
-          <p:cNvPr id="3" name="MEBOG">
+          <p:cNvPr id="2" name="imgMarco-D5">
             <a:extLst>
               <a:ext uri="{FF2B5EF4-FFF2-40B4-BE49-F238E27FC236}">
-                <a16:creationId xmlns:a16="http://schemas.microsoft.com/office/drawing/2014/main" id="{EF925DFB-D9BC-4A45-9998-863DB9F48D59}"/>
+                <a16:creationId xmlns:a16="http://schemas.microsoft.com/office/drawing/2014/main" id="{BC2A07EA-7B31-48E7-9643-CB8DAB18CB42}"/>
               </a:ext>
             </a:extLst>
           </p:cNvPr>
@@ -19239,381 +19721,8 @@
         </p:nvSpPr>
         <p:spPr>
           <a:xfrm>
-            <a:off x="1330324" y="5689090"/>
-            <a:ext cx="1243797" cy="430887"/>
-          </a:xfrm>
-          <a:prstGeom prst="rect">
-            <a:avLst/>
-          </a:prstGeom>
-        </p:spPr>
-        <p:txBody>
-          <a:bodyPr wrap="square" anchor="ctr">
-            <a:spAutoFit/>
-          </a:bodyPr>
-          <a:lstStyle/>
-          <a:p>
-            <a:pPr marL="22860" marR="5080">
-              <a:lnSpc>
-                <a:spcPct val="154100"/>
-              </a:lnSpc>
-              <a:spcBef>
-                <a:spcPts val="950"/>
-              </a:spcBef>
-            </a:pPr>
-            <a:r>
-              <a:rPr lang="es-MX" sz="1600" dirty="0">
-                <a:solidFill>
-                  <a:srgbClr val="7E7E7E"/>
-                </a:solidFill>
-                <a:latin typeface="Calibri" panose="020F0502020204030204" pitchFamily="34" charset="0"/>
-                <a:cs typeface="Calibri"/>
-              </a:rPr>
-              <a:t>MEBOG: </a:t>
-            </a:r>
-          </a:p>
-        </p:txBody>
-      </p:sp>
-      <p:sp>
-        <p:nvSpPr>
-          <p:cNvPr id="4" name="BOMBEROS">
-            <a:extLst>
-              <a:ext uri="{FF2B5EF4-FFF2-40B4-BE49-F238E27FC236}">
-                <a16:creationId xmlns:a16="http://schemas.microsoft.com/office/drawing/2014/main" id="{03C69280-59CA-4CE6-A8C8-68176FBFA0B9}"/>
-              </a:ext>
-            </a:extLst>
-          </p:cNvPr>
-          <p:cNvSpPr/>
-          <p:nvPr/>
-        </p:nvSpPr>
-        <p:spPr>
-          <a:xfrm>
-            <a:off x="1330324" y="5258203"/>
-            <a:ext cx="1243797" cy="430887"/>
-          </a:xfrm>
-          <a:prstGeom prst="rect">
-            <a:avLst/>
-          </a:prstGeom>
-        </p:spPr>
-        <p:txBody>
-          <a:bodyPr wrap="square" anchor="ctr">
-            <a:spAutoFit/>
-          </a:bodyPr>
-          <a:lstStyle/>
-          <a:p>
-            <a:pPr marL="22860" marR="5080">
-              <a:lnSpc>
-                <a:spcPct val="154100"/>
-              </a:lnSpc>
-              <a:spcBef>
-                <a:spcPts val="950"/>
-              </a:spcBef>
-            </a:pPr>
-            <a:r>
-              <a:rPr lang="es-MX" sz="1600" dirty="0">
-                <a:solidFill>
-                  <a:srgbClr val="7E7E7E"/>
-                </a:solidFill>
-                <a:latin typeface="Calibri" panose="020F0502020204030204" pitchFamily="34" charset="0"/>
-                <a:cs typeface="Calibri"/>
-              </a:rPr>
-              <a:t>BOMBEROS: </a:t>
-            </a:r>
-          </a:p>
-        </p:txBody>
-      </p:sp>
-      <p:sp>
-        <p:nvSpPr>
-          <p:cNvPr id="5" name="IDIGER">
-            <a:extLst>
-              <a:ext uri="{FF2B5EF4-FFF2-40B4-BE49-F238E27FC236}">
-                <a16:creationId xmlns:a16="http://schemas.microsoft.com/office/drawing/2014/main" id="{A4C2FB40-27A7-40CD-B6B6-4742DB30E3C7}"/>
-              </a:ext>
-            </a:extLst>
-          </p:cNvPr>
-          <p:cNvSpPr/>
-          <p:nvPr/>
-        </p:nvSpPr>
-        <p:spPr>
-          <a:xfrm>
-            <a:off x="1330324" y="4801958"/>
-            <a:ext cx="1249914" cy="430887"/>
-          </a:xfrm>
-          <a:prstGeom prst="rect">
-            <a:avLst/>
-          </a:prstGeom>
-        </p:spPr>
-        <p:txBody>
-          <a:bodyPr wrap="square" anchor="ctr">
-            <a:spAutoFit/>
-          </a:bodyPr>
-          <a:lstStyle/>
-          <a:p>
-            <a:pPr marL="22860" marR="5080">
-              <a:lnSpc>
-                <a:spcPct val="154100"/>
-              </a:lnSpc>
-              <a:spcBef>
-                <a:spcPts val="950"/>
-              </a:spcBef>
-            </a:pPr>
-            <a:r>
-              <a:rPr lang="es-MX" sz="1600" dirty="0">
-                <a:solidFill>
-                  <a:srgbClr val="7E7E7E"/>
-                </a:solidFill>
-                <a:latin typeface="Calibri" panose="020F0502020204030204" pitchFamily="34" charset="0"/>
-                <a:cs typeface="Calibri"/>
-              </a:rPr>
-              <a:t>IDIGER: </a:t>
-            </a:r>
-          </a:p>
-        </p:txBody>
-      </p:sp>
-      <p:sp>
-        <p:nvSpPr>
-          <p:cNvPr id="6" name="MOVILIDAD">
-            <a:extLst>
-              <a:ext uri="{FF2B5EF4-FFF2-40B4-BE49-F238E27FC236}">
-                <a16:creationId xmlns:a16="http://schemas.microsoft.com/office/drawing/2014/main" id="{8B8758AD-F221-4312-B2E5-DFB915E46BAD}"/>
-              </a:ext>
-            </a:extLst>
-          </p:cNvPr>
-          <p:cNvSpPr/>
-          <p:nvPr/>
-        </p:nvSpPr>
-        <p:spPr>
-          <a:xfrm>
-            <a:off x="1330325" y="4366914"/>
-            <a:ext cx="1249914" cy="430887"/>
-          </a:xfrm>
-          <a:prstGeom prst="rect">
-            <a:avLst/>
-          </a:prstGeom>
-        </p:spPr>
-        <p:txBody>
-          <a:bodyPr wrap="square">
-            <a:spAutoFit/>
-          </a:bodyPr>
-          <a:lstStyle/>
-          <a:p>
-            <a:pPr marL="22860" marR="5080">
-              <a:lnSpc>
-                <a:spcPct val="154100"/>
-              </a:lnSpc>
-              <a:spcBef>
-                <a:spcPts val="950"/>
-              </a:spcBef>
-            </a:pPr>
-            <a:r>
-              <a:rPr lang="es-MX" sz="1600" dirty="0">
-                <a:solidFill>
-                  <a:srgbClr val="7E7E7E"/>
-                </a:solidFill>
-                <a:latin typeface="Calibri" panose="020F0502020204030204" pitchFamily="34" charset="0"/>
-                <a:cs typeface="Calibri"/>
-              </a:rPr>
-              <a:t>MOVILIDAD: </a:t>
-            </a:r>
-          </a:p>
-        </p:txBody>
-      </p:sp>
-      <p:sp>
-        <p:nvSpPr>
-          <p:cNvPr id="7" name="CRUE">
-            <a:extLst>
-              <a:ext uri="{FF2B5EF4-FFF2-40B4-BE49-F238E27FC236}">
-                <a16:creationId xmlns:a16="http://schemas.microsoft.com/office/drawing/2014/main" id="{B2F3C607-625F-49A9-973A-CFD262618D3E}"/>
-              </a:ext>
-            </a:extLst>
-          </p:cNvPr>
-          <p:cNvSpPr/>
-          <p:nvPr/>
-        </p:nvSpPr>
-        <p:spPr>
-          <a:xfrm>
-            <a:off x="1330325" y="3936027"/>
-            <a:ext cx="1249914" cy="430887"/>
-          </a:xfrm>
-          <a:prstGeom prst="rect">
-            <a:avLst/>
-          </a:prstGeom>
-        </p:spPr>
-        <p:txBody>
-          <a:bodyPr wrap="square">
-            <a:spAutoFit/>
-          </a:bodyPr>
-          <a:lstStyle/>
-          <a:p>
-            <a:pPr marL="22860" marR="5080">
-              <a:lnSpc>
-                <a:spcPct val="154100"/>
-              </a:lnSpc>
-              <a:spcBef>
-                <a:spcPts val="950"/>
-              </a:spcBef>
-            </a:pPr>
-            <a:r>
-              <a:rPr lang="es-MX" sz="1600" dirty="0">
-                <a:solidFill>
-                  <a:srgbClr val="7E7E7E"/>
-                </a:solidFill>
-                <a:latin typeface="Calibri" panose="020F0502020204030204" pitchFamily="34" charset="0"/>
-                <a:cs typeface="Calibri"/>
-              </a:rPr>
-              <a:t>CRUE: </a:t>
-            </a:r>
-          </a:p>
-        </p:txBody>
-      </p:sp>
-      <p:sp>
-        <p:nvSpPr>
-          <p:cNvPr id="8" name="SUR">
-            <a:extLst>
-              <a:ext uri="{FF2B5EF4-FFF2-40B4-BE49-F238E27FC236}">
-                <a16:creationId xmlns:a16="http://schemas.microsoft.com/office/drawing/2014/main" id="{250C0775-7307-46F5-A472-CEEC9D727EA1}"/>
-              </a:ext>
-            </a:extLst>
-          </p:cNvPr>
-          <p:cNvSpPr/>
-          <p:nvPr/>
-        </p:nvSpPr>
-        <p:spPr>
-          <a:xfrm>
-            <a:off x="1330324" y="3513932"/>
-            <a:ext cx="1239881" cy="430887"/>
-          </a:xfrm>
-          <a:prstGeom prst="rect">
-            <a:avLst/>
-          </a:prstGeom>
-        </p:spPr>
-        <p:txBody>
-          <a:bodyPr wrap="square">
-            <a:spAutoFit/>
-          </a:bodyPr>
-          <a:lstStyle/>
-          <a:p>
-            <a:pPr marL="22860" marR="5080">
-              <a:lnSpc>
-                <a:spcPct val="154100"/>
-              </a:lnSpc>
-              <a:spcBef>
-                <a:spcPts val="950"/>
-              </a:spcBef>
-            </a:pPr>
-            <a:r>
-              <a:rPr lang="es-ES" altLang="zh-TW" sz="1600" dirty="0">
-                <a:solidFill>
-                  <a:srgbClr val="7E7E7E"/>
-                </a:solidFill>
-                <a:latin typeface="Calibri" panose="020F0502020204030204" pitchFamily="34" charset="0"/>
-                <a:cs typeface="Calibri"/>
-              </a:rPr>
-              <a:t>SUR:</a:t>
-            </a:r>
-            <a:endParaRPr lang="es-MX" sz="1600" dirty="0">
-              <a:solidFill>
-                <a:srgbClr val="7E7E7E"/>
-              </a:solidFill>
-              <a:latin typeface="Calibri" panose="020F0502020204030204" pitchFamily="34" charset="0"/>
-              <a:cs typeface="Calibri"/>
-            </a:endParaRPr>
-          </a:p>
-        </p:txBody>
-      </p:sp>
-      <p:sp>
-        <p:nvSpPr>
-          <p:cNvPr id="9" name="imgMarco-D3">
-            <a:extLst>
-              <a:ext uri="{FF2B5EF4-FFF2-40B4-BE49-F238E27FC236}">
-                <a16:creationId xmlns:a16="http://schemas.microsoft.com/office/drawing/2014/main" id="{AB2D75AC-B7C6-4207-AA7C-121D5341E167}"/>
-              </a:ext>
-            </a:extLst>
-          </p:cNvPr>
-          <p:cNvSpPr/>
-          <p:nvPr/>
-        </p:nvSpPr>
-        <p:spPr>
-          <a:xfrm>
-            <a:off x="6104635" y="1865494"/>
-            <a:ext cx="5031678" cy="2921011"/>
-          </a:xfrm>
-          <a:prstGeom prst="rect">
-            <a:avLst/>
-          </a:prstGeom>
-          <a:noFill/>
-          <a:ln>
-            <a:noFill/>
-          </a:ln>
-        </p:spPr>
-        <p:style>
-          <a:lnRef idx="0">
-            <a:scrgbClr r="0" g="0" b="0"/>
-          </a:lnRef>
-          <a:fillRef idx="0">
-            <a:scrgbClr r="0" g="0" b="0"/>
-          </a:fillRef>
-          <a:effectRef idx="0">
-            <a:scrgbClr r="0" g="0" b="0"/>
-          </a:effectRef>
-          <a:fontRef idx="minor">
-            <a:schemeClr val="accent2"/>
-          </a:fontRef>
-        </p:style>
-        <p:txBody>
-          <a:bodyPr rtlCol="0" anchor="ctr"/>
-          <a:lstStyle/>
-          <a:p>
-            <a:pPr algn="ctr"/>
-            <a:endParaRPr lang="es-ES" u="sng" dirty="0"/>
-          </a:p>
-        </p:txBody>
-      </p:sp>
-    </p:spTree>
-    <p:extLst>
-      <p:ext uri="{BB962C8B-B14F-4D97-AF65-F5344CB8AC3E}">
-        <p14:creationId xmlns:p14="http://schemas.microsoft.com/office/powerpoint/2010/main" val="3998951388"/>
-      </p:ext>
-    </p:extLst>
-  </p:cSld>
-  <p:clrMapOvr>
-    <a:masterClrMapping/>
-  </p:clrMapOvr>
-</p:sld>
-</file>
-
-<file path=ppt/slides/slide4.xml><?xml version="1.0" encoding="utf-8"?>
-<p:sld xmlns:a="http://schemas.openxmlformats.org/drawingml/2006/main" xmlns:r="http://schemas.openxmlformats.org/officeDocument/2006/relationships" xmlns:p="http://schemas.openxmlformats.org/presentationml/2006/main">
-  <p:cSld>
-    <p:spTree>
-      <p:nvGrpSpPr>
-        <p:cNvPr id="1" name=""/>
-        <p:cNvGrpSpPr/>
-        <p:nvPr/>
-      </p:nvGrpSpPr>
-      <p:grpSpPr>
-        <a:xfrm>
-          <a:off x="0" y="0"/>
-          <a:ext cx="0" cy="0"/>
-          <a:chOff x="0" y="0"/>
-          <a:chExt cx="0" cy="0"/>
-        </a:xfrm>
-      </p:grpSpPr>
-      <p:sp>
-        <p:nvSpPr>
-          <p:cNvPr id="4" name="imgMarco-D4">
-            <a:extLst>
-              <a:ext uri="{FF2B5EF4-FFF2-40B4-BE49-F238E27FC236}">
-                <a16:creationId xmlns:a16="http://schemas.microsoft.com/office/drawing/2014/main" id="{23D293B4-424A-432C-8E0D-710A7C04596C}"/>
-              </a:ext>
-            </a:extLst>
-          </p:cNvPr>
-          <p:cNvSpPr/>
-          <p:nvPr/>
-        </p:nvSpPr>
-        <p:spPr>
-          <a:xfrm>
-            <a:off x="1312302" y="1807067"/>
-            <a:ext cx="9567393" cy="3751730"/>
+            <a:off x="1261586" y="1436460"/>
+            <a:ext cx="9668828" cy="4537530"/>
           </a:xfrm>
           <a:prstGeom prst="rect">
             <a:avLst/>
@@ -19649,7 +19758,7 @@
     </p:spTree>
     <p:extLst>
       <p:ext uri="{BB962C8B-B14F-4D97-AF65-F5344CB8AC3E}">
-        <p14:creationId xmlns:p14="http://schemas.microsoft.com/office/powerpoint/2010/main" val="944955111"/>
+        <p14:creationId xmlns:p14="http://schemas.microsoft.com/office/powerpoint/2010/main" val="714843866"/>
       </p:ext>
     </p:extLst>
   </p:cSld>
@@ -19659,7 +19768,7 @@
 </p:sld>
 </file>
 
-<file path=ppt/slides/slide5.xml><?xml version="1.0" encoding="utf-8"?>
+<file path=ppt/slides/slide6.xml><?xml version="1.0" encoding="utf-8"?>
 <p:sld xmlns:a="http://schemas.openxmlformats.org/drawingml/2006/main" xmlns:r="http://schemas.openxmlformats.org/officeDocument/2006/relationships" xmlns:p="http://schemas.openxmlformats.org/presentationml/2006/main">
   <p:cSld>
     <p:spTree>
@@ -19678,10 +19787,10 @@
       </p:grpSpPr>
       <p:sp>
         <p:nvSpPr>
-          <p:cNvPr id="4" name="imgMarco-D5">
+          <p:cNvPr id="2" name="imgMarco-D6">
             <a:extLst>
               <a:ext uri="{FF2B5EF4-FFF2-40B4-BE49-F238E27FC236}">
-                <a16:creationId xmlns:a16="http://schemas.microsoft.com/office/drawing/2014/main" id="{88291FB5-3B4D-4AEA-8337-F75C945EE880}"/>
+                <a16:creationId xmlns:a16="http://schemas.microsoft.com/office/drawing/2014/main" id="{61FF70FA-279C-4A42-9485-D809B8AD311F}"/>
               </a:ext>
             </a:extLst>
           </p:cNvPr>
@@ -19690,8 +19799,8 @@
         </p:nvSpPr>
         <p:spPr>
           <a:xfrm>
-            <a:off x="1261586" y="1870990"/>
-            <a:ext cx="9668828" cy="3668467"/>
+            <a:off x="1261586" y="1436460"/>
+            <a:ext cx="9668828" cy="4537530"/>
           </a:xfrm>
           <a:prstGeom prst="rect">
             <a:avLst/>
@@ -19727,85 +19836,7 @@
     </p:spTree>
     <p:extLst>
       <p:ext uri="{BB962C8B-B14F-4D97-AF65-F5344CB8AC3E}">
-        <p14:creationId xmlns:p14="http://schemas.microsoft.com/office/powerpoint/2010/main" val="3711399914"/>
-      </p:ext>
-    </p:extLst>
-  </p:cSld>
-  <p:clrMapOvr>
-    <a:masterClrMapping/>
-  </p:clrMapOvr>
-</p:sld>
-</file>
-
-<file path=ppt/slides/slide6.xml><?xml version="1.0" encoding="utf-8"?>
-<p:sld xmlns:a="http://schemas.openxmlformats.org/drawingml/2006/main" xmlns:r="http://schemas.openxmlformats.org/officeDocument/2006/relationships" xmlns:p="http://schemas.openxmlformats.org/presentationml/2006/main">
-  <p:cSld>
-    <p:spTree>
-      <p:nvGrpSpPr>
-        <p:cNvPr id="1" name=""/>
-        <p:cNvGrpSpPr/>
-        <p:nvPr/>
-      </p:nvGrpSpPr>
-      <p:grpSpPr>
-        <a:xfrm>
-          <a:off x="0" y="0"/>
-          <a:ext cx="0" cy="0"/>
-          <a:chOff x="0" y="0"/>
-          <a:chExt cx="0" cy="0"/>
-        </a:xfrm>
-      </p:grpSpPr>
-      <p:sp>
-        <p:nvSpPr>
-          <p:cNvPr id="4" name="imgMarco-D6">
-            <a:extLst>
-              <a:ext uri="{FF2B5EF4-FFF2-40B4-BE49-F238E27FC236}">
-                <a16:creationId xmlns:a16="http://schemas.microsoft.com/office/drawing/2014/main" id="{61B6A31B-F3A6-4452-8DCD-F073D085E075}"/>
-              </a:ext>
-            </a:extLst>
-          </p:cNvPr>
-          <p:cNvSpPr/>
-          <p:nvPr/>
-        </p:nvSpPr>
-        <p:spPr>
-          <a:xfrm>
-            <a:off x="1261586" y="1866454"/>
-            <a:ext cx="9668828" cy="3677540"/>
-          </a:xfrm>
-          <a:prstGeom prst="rect">
-            <a:avLst/>
-          </a:prstGeom>
-          <a:noFill/>
-          <a:ln>
-            <a:noFill/>
-          </a:ln>
-        </p:spPr>
-        <p:style>
-          <a:lnRef idx="0">
-            <a:scrgbClr r="0" g="0" b="0"/>
-          </a:lnRef>
-          <a:fillRef idx="0">
-            <a:scrgbClr r="0" g="0" b="0"/>
-          </a:fillRef>
-          <a:effectRef idx="0">
-            <a:scrgbClr r="0" g="0" b="0"/>
-          </a:effectRef>
-          <a:fontRef idx="minor">
-            <a:schemeClr val="accent2"/>
-          </a:fontRef>
-        </p:style>
-        <p:txBody>
-          <a:bodyPr rtlCol="0" anchor="ctr"/>
-          <a:lstStyle/>
-          <a:p>
-            <a:pPr algn="ctr"/>
-            <a:endParaRPr lang="es-ES" u="sng" dirty="0"/>
-          </a:p>
-        </p:txBody>
-      </p:sp>
-    </p:spTree>
-    <p:extLst>
-      <p:ext uri="{BB962C8B-B14F-4D97-AF65-F5344CB8AC3E}">
-        <p14:creationId xmlns:p14="http://schemas.microsoft.com/office/powerpoint/2010/main" val="2719910023"/>
+        <p14:creationId xmlns:p14="http://schemas.microsoft.com/office/powerpoint/2010/main" val="2337618543"/>
       </p:ext>
     </p:extLst>
   </p:cSld>
@@ -19834,10 +19865,10 @@
       </p:grpSpPr>
       <p:sp>
         <p:nvSpPr>
-          <p:cNvPr id="2" name="imgMarco-D7">
+          <p:cNvPr id="5" name="imgMarco-D7">
             <a:extLst>
               <a:ext uri="{FF2B5EF4-FFF2-40B4-BE49-F238E27FC236}">
-                <a16:creationId xmlns:a16="http://schemas.microsoft.com/office/drawing/2014/main" id="{F1AD05EE-A676-405E-A49C-14298F128DEB}"/>
+                <a16:creationId xmlns:a16="http://schemas.microsoft.com/office/drawing/2014/main" id="{743FADF2-343F-4582-82E2-B7749D40BACA}"/>
               </a:ext>
             </a:extLst>
           </p:cNvPr>
@@ -19846,8 +19877,8 @@
         </p:nvSpPr>
         <p:spPr>
           <a:xfrm>
-            <a:off x="774528" y="1766148"/>
-            <a:ext cx="5934090" cy="3325705"/>
+            <a:off x="1055687" y="1149791"/>
+            <a:ext cx="5638411" cy="4544840"/>
           </a:xfrm>
           <a:prstGeom prst="rect">
             <a:avLst/>
@@ -19882,10 +19913,10 @@
       </p:sp>
       <p:sp>
         <p:nvSpPr>
-          <p:cNvPr id="4" name="txt-D7">
+          <p:cNvPr id="6" name="txt-D7">
             <a:extLst>
               <a:ext uri="{FF2B5EF4-FFF2-40B4-BE49-F238E27FC236}">
-                <a16:creationId xmlns:a16="http://schemas.microsoft.com/office/drawing/2014/main" id="{9A329666-0C27-4EC9-87AE-C1EDC63A5DA1}"/>
+                <a16:creationId xmlns:a16="http://schemas.microsoft.com/office/drawing/2014/main" id="{AD3A8A23-7FD7-444A-A8A2-2D9F40C8630D}"/>
               </a:ext>
             </a:extLst>
           </p:cNvPr>
@@ -19894,8 +19925,8 @@
         </p:nvSpPr>
         <p:spPr>
           <a:xfrm>
-            <a:off x="6708618" y="1015998"/>
-            <a:ext cx="4427695" cy="338554"/>
+            <a:off x="6708619" y="1015998"/>
+            <a:ext cx="4327556" cy="338554"/>
           </a:xfrm>
           <a:prstGeom prst="rect">
             <a:avLst/>
@@ -19938,7 +19969,7 @@
     </p:spTree>
     <p:extLst>
       <p:ext uri="{BB962C8B-B14F-4D97-AF65-F5344CB8AC3E}">
-        <p14:creationId xmlns:p14="http://schemas.microsoft.com/office/powerpoint/2010/main" val="1849356481"/>
+        <p14:creationId xmlns:p14="http://schemas.microsoft.com/office/powerpoint/2010/main" val="3485212652"/>
       </p:ext>
     </p:extLst>
   </p:cSld>
@@ -19967,10 +19998,10 @@
       </p:grpSpPr>
       <p:sp>
         <p:nvSpPr>
-          <p:cNvPr id="2" name="imgMarco-D8">
+          <p:cNvPr id="4" name="imgMarco-D8">
             <a:extLst>
               <a:ext uri="{FF2B5EF4-FFF2-40B4-BE49-F238E27FC236}">
-                <a16:creationId xmlns:a16="http://schemas.microsoft.com/office/drawing/2014/main" id="{AF5A3BC3-9EAA-4D4E-BE8F-C51F01F4E75F}"/>
+                <a16:creationId xmlns:a16="http://schemas.microsoft.com/office/drawing/2014/main" id="{153A2588-4167-413E-97A8-F8A0F3894319}"/>
               </a:ext>
             </a:extLst>
           </p:cNvPr>
@@ -20016,7 +20047,7 @@
     </p:spTree>
     <p:extLst>
       <p:ext uri="{BB962C8B-B14F-4D97-AF65-F5344CB8AC3E}">
-        <p14:creationId xmlns:p14="http://schemas.microsoft.com/office/powerpoint/2010/main" val="3756880807"/>
+        <p14:creationId xmlns:p14="http://schemas.microsoft.com/office/powerpoint/2010/main" val="3833414541"/>
       </p:ext>
     </p:extLst>
   </p:cSld>
@@ -20048,7 +20079,7 @@
           <p:cNvPr id="2" name="imgMarco-D9-1">
             <a:extLst>
               <a:ext uri="{FF2B5EF4-FFF2-40B4-BE49-F238E27FC236}">
-                <a16:creationId xmlns:a16="http://schemas.microsoft.com/office/drawing/2014/main" id="{52B9B867-C0DD-4CBA-833D-49366F4F101C}"/>
+                <a16:creationId xmlns:a16="http://schemas.microsoft.com/office/drawing/2014/main" id="{5287EAEF-99AE-451F-A465-D7204DEE194C}"/>
               </a:ext>
             </a:extLst>
           </p:cNvPr>
@@ -20058,7 +20089,7 @@
         <p:spPr>
           <a:xfrm>
             <a:off x="1198685" y="1436460"/>
-            <a:ext cx="4834414" cy="3985081"/>
+            <a:ext cx="5473578" cy="4537530"/>
           </a:xfrm>
           <a:prstGeom prst="rect">
             <a:avLst/>
@@ -20096,7 +20127,7 @@
           <p:cNvPr id="3" name="imgMarco-D9-2">
             <a:extLst>
               <a:ext uri="{FF2B5EF4-FFF2-40B4-BE49-F238E27FC236}">
-                <a16:creationId xmlns:a16="http://schemas.microsoft.com/office/drawing/2014/main" id="{A30CB4A7-BC2B-452D-B328-8A015A6A0063}"/>
+                <a16:creationId xmlns:a16="http://schemas.microsoft.com/office/drawing/2014/main" id="{5A6ADD38-83C8-4635-8F6E-6E1FA38A895C}"/>
               </a:ext>
             </a:extLst>
           </p:cNvPr>
@@ -20105,8 +20136,8 @@
         </p:nvSpPr>
         <p:spPr>
           <a:xfrm>
-            <a:off x="6158902" y="1436460"/>
-            <a:ext cx="4834414" cy="3985080"/>
+            <a:off x="6735777" y="1988910"/>
+            <a:ext cx="4400535" cy="3432630"/>
           </a:xfrm>
           <a:prstGeom prst="rect">
             <a:avLst/>
@@ -20142,7 +20173,7 @@
     </p:spTree>
     <p:extLst>
       <p:ext uri="{BB962C8B-B14F-4D97-AF65-F5344CB8AC3E}">
-        <p14:creationId xmlns:p14="http://schemas.microsoft.com/office/powerpoint/2010/main" val="1626156620"/>
+        <p14:creationId xmlns:p14="http://schemas.microsoft.com/office/powerpoint/2010/main" val="1927413702"/>
       </p:ext>
     </p:extLst>
   </p:cSld>
